--- a/agent/slides/impress-a-codewalk.pptx
+++ b/agent/slides/impress-a-codewalk.pptx
@@ -3466,7 +3466,7 @@
                 <a:ea typeface="Calibri" pitchFamily="34" charset="-122"/>
                 <a:cs typeface="Calibri" pitchFamily="34" charset="-120"/>
               </a:rPr>
-              <a:t>Lab code walk · main @ 3e64ba6 · 6.5k lines of source, 152 tests, 11 tools in 5 toolkits</a:t>
+              <a:t>Lab code walk · main @ 79e539f · 6.5k lines of source, 154 tests, 11 tools in 5 toolkits</a:t>
             </a:r>
             <a:endParaRPr lang="en-US" sz="1200" dirty="0"/>
           </a:p>
@@ -14036,7 +14036,7 @@
                 <a:ea typeface="Consolas" pitchFamily="34" charset="-122"/>
                 <a:cs typeface="Consolas" pitchFamily="34" charset="-120"/>
               </a:rPr>
-              <a:t>pytest tests -q                    # 152 tests, no allocation</a:t>
+              <a:t>pytest tests -q                    # 154 tests, no allocation</a:t>
             </a:r>
             <a:endParaRPr lang="en-US" sz="1000" dirty="0"/>
           </a:p>
@@ -36254,7 +36254,7 @@
                 <a:ea typeface="Consolas" pitchFamily="34" charset="-122"/>
                 <a:cs typeface="Consolas" pitchFamily="34" charset="-120"/>
               </a:rPr>
-              <a:t>async def make_engine_bounded(kind, config, timeout_s, heartbeat_s):</a:t>
+              <a:t>async def make_engine_bounded(kind, config, timeout_s, heartbeat_s, work_dir):</a:t>
             </a:r>
             <a:endParaRPr lang="en-US" sz="792" dirty="0"/>
           </a:p>
@@ -36452,7 +36452,7 @@
                 <a:ea typeface="Consolas" pitchFamily="34" charset="-122"/>
                 <a:cs typeface="Consolas" pitchFamily="34" charset="-120"/>
               </a:rPr>
-              <a:t>        return await WorkflowEngine.create(backend=backend), backend</a:t>
+              <a:t>        return await WorkflowEngine.create(backend=backend, work_dir=work_dir), backend</a:t>
             </a:r>
             <a:endParaRPr lang="en-US" sz="792" dirty="0"/>
           </a:p>

--- a/agent/slides/impress-a-codewalk.pptx
+++ b/agent/slides/impress-a-codewalk.pptx
@@ -1899,8 +1899,8 @@
               <a:rPr lang="en-US" dirty="0"/>
               <a:t>[1:00] One experiment, left to right, naming the type at each hop — the types are the contract between layers.
 The executor builds an observation. The policy returns a decision carrying an experiment intent: tool ids, parameters, a replica count. It is abstract, there is no DAG in it. The composer turns it into a typed graph, which is plain data. Dispatch registers that graph and hands back a handle without awaiting. What comes back is a run outcome, serializable and core-typed, so a reasoner in another process can hold it.
-Underneath is an actual run on this laptop. Four admissions over three cycles. The first row was refused by the interlock — a provisional pattern is capped at ten percent of available budget and three lineages did not fit. The policy shrank to two and resubmitted. That is the retry doing its job: a refusal costs an attempt, not the experiment.
-Six design nodes, every one marked suspect, because the shape stayed provisional until the third clean run promoted it.</a:t>
+Underneath is an actual run on this laptop. The first row was refused by the interlock — a provisional pattern is capped at ten percent of available budget and three lineages did not fit. The policy shrank to two and resubmitted. That is the retry doing its job: a refusal costs an attempt, not the experiment.
+Every design node is marked suspect, because the shape is provisional while it runs. Promotion takes three clean runs, and the card on the right says whether this one got there before the front target stopped it.</a:t>
             </a:r>
             <a:endParaRPr lang="en-US" dirty="0"/>
           </a:p>
@@ -1992,7 +1992,7 @@
 Five gates, in order, first refusal wins. Gate two rejects a tool composed without its QC gates, so you cannot compose your way out of quality control. Gate four rejects a P6 tool somebody tried to schedule — those are meant to be inlined, and a scheduled one is a composer bug.
 Then three things that are not gates. The interlock. A dry-run, where every agent parameterizes without executing — that catches a graph that type-checks but cannot be turned into a command line. And a reservation.
 Reserve is last for a reason: the dry-run awaits, and by the time it returns another submission may have claimed the budget gate five saw. Reserve re-checks against available budget and is the authoritative decision.
-On the right, the trust half. A pattern is the graph's shape — tool ids and typed edges, hashed, parameter values deliberately excluded so tuning a parameter does not reset trust. A provisional shape is capped, forced through a dry-run, marked suspect whatever it scores, and may have only one instance in flight, because promotion counts consecutive clean runs and N concurrent copies are one draw sampled N times.
+On the right, the trust half. A pattern is the graph's shape — tool ids and typed edges, hashed, parameter values deliberately excluded so tuning a parameter does not reset trust. A provisional shape is capped, forced through a dry-run, marked suspect whatever it scores, and may have only one instance in flight, because promotion counts consecutive clean runs and N concurrent copies are one draw sampled N times. Clean means no integrity gate failed: the tool ran and reported real numbers. A design that merely scores below a quality threshold still fails its node, but it is not evidence against the shape. Counting it was why our five-cycle trust run on Delta promoted nothing.
 The limit, from our own limitations doc: this buys examination and delay, not soundness. A consistent novel silent failure promotes.</a:t>
             </a:r>
             <a:endParaRPr lang="en-US" dirty="0"/>
@@ -3466,7 +3466,7 @@
                 <a:ea typeface="Calibri" pitchFamily="34" charset="-122"/>
                 <a:cs typeface="Calibri" pitchFamily="34" charset="-120"/>
               </a:rPr>
-              <a:t>Lab code walk · main @ 79e539f · 6.5k lines of source, 154 tests, 11 tools in 5 toolkits</a:t>
+              <a:t>Lab code walk · main @ 7acce29 · 6.5k lines of source, 162 tests, 11 tools in 5 toolkits</a:t>
             </a:r>
             <a:endParaRPr lang="en-US" sz="1200" dirty="0"/>
           </a:p>
@@ -8097,7 +8097,7 @@
                 <a:ea typeface="Consolas" pitchFamily="34" charset="-122"/>
                 <a:cs typeface="Consolas" pitchFamily="34" charset="-120"/>
               </a:rPr>
-              <a:t>composer.py:45 · validate.py:106 · spec.py:106  ·  EDITED — @property elided</a:t>
+              <a:t>composer.py:45 · validate.py:106 · spec.py:107  ·  EDITED — @property elided</a:t>
             </a:r>
             <a:endParaRPr lang="en-US" sz="850" dirty="0"/>
           </a:p>
@@ -14036,7 +14036,7 @@
                 <a:ea typeface="Consolas" pitchFamily="34" charset="-122"/>
                 <a:cs typeface="Consolas" pitchFamily="34" charset="-120"/>
               </a:rPr>
-              <a:t>pytest tests -q                    # 154 tests, no allocation</a:t>
+              <a:t>pytest tests -q                    # 162 tests, no allocation</a:t>
             </a:r>
             <a:endParaRPr lang="en-US" sz="1000" dirty="0"/>
           </a:p>
@@ -23776,7 +23776,7 @@
                           <a:ea typeface="Calibri" pitchFamily="34" charset="-122"/>
                           <a:cs typeface="Calibri" pitchFamily="34" charset="-120"/>
                         </a:rPr>
-                        <a:t>A novel graph shape runs under a cost cap, a forced dry-run, and is marked suspect whatever it scores. Promotion is N consecutive clean runs; demotion is immediate.</a:t>
+                        <a:t>A novel graph shape runs under a cost cap, a forced dry-run, and is marked suspect whatever it scores. Promotion is N consecutive integrity-clean runs; demotion is immediate.</a:t>
                       </a:r>
                       <a:endParaRPr lang="en-US" sz="1150" dirty="0">
                         <a:latin typeface="Calibri" charset="0"/>
@@ -29069,7 +29069,7 @@
                 <a:ea typeface="Consolas" pitchFamily="34" charset="-122"/>
                 <a:cs typeface="Consolas" pitchFamily="34" charset="-120"/>
               </a:rPr>
-              <a:t>  cycles   : 3</a:t>
+              <a:t>  cycles   : 2</a:t>
             </a:r>
             <a:endParaRPr lang="en-US" sz="1000" dirty="0"/>
           </a:p>
@@ -29109,7 +29109,7 @@
                 <a:ea typeface="Consolas" pitchFamily="34" charset="-122"/>
                 <a:cs typeface="Consolas" pitchFamily="34" charset="-120"/>
               </a:rPr>
-              <a:t>  nodes    : 6  front: 4</a:t>
+              <a:t>  nodes    : 4  front: 3</a:t>
             </a:r>
             <a:endParaRPr lang="en-US" sz="1000" dirty="0"/>
           </a:p>
@@ -30551,348 +30551,6 @@
                   </a:tcPr>
                 </a:tc>
               </a:tr>
-              <a:tr h="274320">
-                <a:tc>
-                  <a:txBody>
-                    <a:bodyPr/>
-                    <a:lstStyle/>
-                    <a:p>
-                      <a:pPr algn="l" indent="0" marL="0">
-                        <a:buNone/>
-                      </a:pPr>
-                      <a:r>
-                        <a:rPr lang="en-US" sz="1050" b="1" dirty="0">
-                          <a:solidFill>
-                            <a:srgbClr val="22303C"/>
-                          </a:solidFill>
-                          <a:latin typeface="Calibri" pitchFamily="34" charset="0"/>
-                          <a:ea typeface="Calibri" pitchFamily="34" charset="-122"/>
-                          <a:cs typeface="Calibri" pitchFamily="34" charset="-120"/>
-                        </a:rPr>
-                        <a:t>r0004</a:t>
-                      </a:r>
-                      <a:endParaRPr lang="en-US" sz="1050" dirty="0">
-                        <a:latin typeface="Calibri" charset="0"/>
-                        <a:ea typeface="Calibri" charset="0"/>
-                        <a:cs typeface="Calibri" charset="0"/>
-                      </a:endParaRPr>
-                    </a:p>
-                  </a:txBody>
-                  <a:tcPr marL="64008" marR="64008" marT="64008" marB="64008" anchor="ctr">
-                    <a:lnL w="9525" cap="flat" cmpd="sng" algn="ctr">
-                      <a:solidFill>
-                        <a:srgbClr val="C9D1D8"/>
-                      </a:solidFill>
-                      <a:prstDash val="solid"/>
-                      <a:round/>
-                      <a:headEnd type="none" w="med" len="med"/>
-                      <a:tailEnd type="none" w="med" len="med"/>
-                    </a:lnL>
-                    <a:lnR w="9525" cap="flat" cmpd="sng" algn="ctr">
-                      <a:solidFill>
-                        <a:srgbClr val="C9D1D8"/>
-                      </a:solidFill>
-                      <a:prstDash val="solid"/>
-                      <a:round/>
-                      <a:headEnd type="none" w="med" len="med"/>
-                      <a:tailEnd type="none" w="med" len="med"/>
-                    </a:lnR>
-                    <a:lnT w="9525" cap="flat" cmpd="sng" algn="ctr">
-                      <a:solidFill>
-                        <a:srgbClr val="C9D1D8"/>
-                      </a:solidFill>
-                      <a:prstDash val="solid"/>
-                      <a:round/>
-                      <a:headEnd type="none" w="med" len="med"/>
-                      <a:tailEnd type="none" w="med" len="med"/>
-                    </a:lnT>
-                    <a:lnB w="9525" cap="flat" cmpd="sng" algn="ctr">
-                      <a:solidFill>
-                        <a:srgbClr val="C9D1D8"/>
-                      </a:solidFill>
-                      <a:prstDash val="solid"/>
-                      <a:round/>
-                      <a:headEnd type="none" w="med" len="med"/>
-                      <a:tailEnd type="none" w="med" len="med"/>
-                    </a:lnB>
-                    <a:solidFill>
-                      <a:srgbClr val="FFFFFF"/>
-                    </a:solidFill>
-                  </a:tcPr>
-                </a:tc>
-                <a:tc>
-                  <a:txBody>
-                    <a:bodyPr/>
-                    <a:lstStyle/>
-                    <a:p>
-                      <a:pPr algn="l" indent="0" marL="0">
-                        <a:buNone/>
-                      </a:pPr>
-                      <a:r>
-                        <a:rPr lang="en-US" sz="950" dirty="0">
-                          <a:solidFill>
-                            <a:srgbClr val="5E6B75"/>
-                          </a:solidFill>
-                          <a:latin typeface="Consolas" pitchFamily="34" charset="0"/>
-                          <a:ea typeface="Consolas" pitchFamily="34" charset="-122"/>
-                          <a:cs typeface="Consolas" pitchFamily="34" charset="-120"/>
-                        </a:rPr>
-                        <a:t>66bb4923…</a:t>
-                      </a:r>
-                      <a:endParaRPr lang="en-US" sz="950" dirty="0">
-                        <a:latin typeface="Consolas" charset="0"/>
-                        <a:ea typeface="Consolas" charset="0"/>
-                        <a:cs typeface="Consolas" charset="0"/>
-                      </a:endParaRPr>
-                    </a:p>
-                  </a:txBody>
-                  <a:tcPr marL="64008" marR="64008" marT="64008" marB="64008" anchor="ctr">
-                    <a:lnL w="9525" cap="flat" cmpd="sng" algn="ctr">
-                      <a:solidFill>
-                        <a:srgbClr val="C9D1D8"/>
-                      </a:solidFill>
-                      <a:prstDash val="solid"/>
-                      <a:round/>
-                      <a:headEnd type="none" w="med" len="med"/>
-                      <a:tailEnd type="none" w="med" len="med"/>
-                    </a:lnL>
-                    <a:lnR w="9525" cap="flat" cmpd="sng" algn="ctr">
-                      <a:solidFill>
-                        <a:srgbClr val="C9D1D8"/>
-                      </a:solidFill>
-                      <a:prstDash val="solid"/>
-                      <a:round/>
-                      <a:headEnd type="none" w="med" len="med"/>
-                      <a:tailEnd type="none" w="med" len="med"/>
-                    </a:lnR>
-                    <a:lnT w="9525" cap="flat" cmpd="sng" algn="ctr">
-                      <a:solidFill>
-                        <a:srgbClr val="C9D1D8"/>
-                      </a:solidFill>
-                      <a:prstDash val="solid"/>
-                      <a:round/>
-                      <a:headEnd type="none" w="med" len="med"/>
-                      <a:tailEnd type="none" w="med" len="med"/>
-                    </a:lnT>
-                    <a:lnB w="9525" cap="flat" cmpd="sng" algn="ctr">
-                      <a:solidFill>
-                        <a:srgbClr val="C9D1D8"/>
-                      </a:solidFill>
-                      <a:prstDash val="solid"/>
-                      <a:round/>
-                      <a:headEnd type="none" w="med" len="med"/>
-                      <a:tailEnd type="none" w="med" len="med"/>
-                    </a:lnB>
-                    <a:solidFill>
-                      <a:srgbClr val="FFFFFF"/>
-                    </a:solidFill>
-                  </a:tcPr>
-                </a:tc>
-                <a:tc>
-                  <a:txBody>
-                    <a:bodyPr/>
-                    <a:lstStyle/>
-                    <a:p>
-                      <a:pPr algn="ctr" indent="0" marL="0">
-                        <a:buNone/>
-                      </a:pPr>
-                      <a:r>
-                        <a:rPr lang="en-US" sz="1050" dirty="0">
-                          <a:solidFill>
-                            <a:srgbClr val="22303C"/>
-                          </a:solidFill>
-                          <a:latin typeface="Calibri" pitchFamily="34" charset="0"/>
-                          <a:ea typeface="Calibri" pitchFamily="34" charset="-122"/>
-                          <a:cs typeface="Calibri" pitchFamily="34" charset="-120"/>
-                        </a:rPr>
-                        <a:t>8</a:t>
-                      </a:r>
-                      <a:endParaRPr lang="en-US" sz="1050" dirty="0">
-                        <a:latin typeface="Calibri" charset="0"/>
-                        <a:ea typeface="Calibri" charset="0"/>
-                        <a:cs typeface="Calibri" charset="0"/>
-                      </a:endParaRPr>
-                    </a:p>
-                  </a:txBody>
-                  <a:tcPr marL="64008" marR="64008" marT="64008" marB="64008" anchor="ctr">
-                    <a:lnL w="9525" cap="flat" cmpd="sng" algn="ctr">
-                      <a:solidFill>
-                        <a:srgbClr val="C9D1D8"/>
-                      </a:solidFill>
-                      <a:prstDash val="solid"/>
-                      <a:round/>
-                      <a:headEnd type="none" w="med" len="med"/>
-                      <a:tailEnd type="none" w="med" len="med"/>
-                    </a:lnL>
-                    <a:lnR w="9525" cap="flat" cmpd="sng" algn="ctr">
-                      <a:solidFill>
-                        <a:srgbClr val="C9D1D8"/>
-                      </a:solidFill>
-                      <a:prstDash val="solid"/>
-                      <a:round/>
-                      <a:headEnd type="none" w="med" len="med"/>
-                      <a:tailEnd type="none" w="med" len="med"/>
-                    </a:lnR>
-                    <a:lnT w="9525" cap="flat" cmpd="sng" algn="ctr">
-                      <a:solidFill>
-                        <a:srgbClr val="C9D1D8"/>
-                      </a:solidFill>
-                      <a:prstDash val="solid"/>
-                      <a:round/>
-                      <a:headEnd type="none" w="med" len="med"/>
-                      <a:tailEnd type="none" w="med" len="med"/>
-                    </a:lnT>
-                    <a:lnB w="9525" cap="flat" cmpd="sng" algn="ctr">
-                      <a:solidFill>
-                        <a:srgbClr val="C9D1D8"/>
-                      </a:solidFill>
-                      <a:prstDash val="solid"/>
-                      <a:round/>
-                      <a:headEnd type="none" w="med" len="med"/>
-                      <a:tailEnd type="none" w="med" len="med"/>
-                    </a:lnB>
-                    <a:solidFill>
-                      <a:srgbClr val="FFFFFF"/>
-                    </a:solidFill>
-                  </a:tcPr>
-                </a:tc>
-                <a:tc>
-                  <a:txBody>
-                    <a:bodyPr/>
-                    <a:lstStyle/>
-                    <a:p>
-                      <a:pPr algn="ctr" indent="0" marL="0">
-                        <a:buNone/>
-                      </a:pPr>
-                      <a:r>
-                        <a:rPr lang="en-US" sz="1050" dirty="0">
-                          <a:solidFill>
-                            <a:srgbClr val="22303C"/>
-                          </a:solidFill>
-                          <a:latin typeface="Calibri" pitchFamily="34" charset="0"/>
-                          <a:ea typeface="Calibri" pitchFamily="34" charset="-122"/>
-                          <a:cs typeface="Calibri" pitchFamily="34" charset="-120"/>
-                        </a:rPr>
-                        <a:t>0.110</a:t>
-                      </a:r>
-                      <a:endParaRPr lang="en-US" sz="1050" dirty="0">
-                        <a:latin typeface="Calibri" charset="0"/>
-                        <a:ea typeface="Calibri" charset="0"/>
-                        <a:cs typeface="Calibri" charset="0"/>
-                      </a:endParaRPr>
-                    </a:p>
-                  </a:txBody>
-                  <a:tcPr marL="64008" marR="64008" marT="64008" marB="64008" anchor="ctr">
-                    <a:lnL w="9525" cap="flat" cmpd="sng" algn="ctr">
-                      <a:solidFill>
-                        <a:srgbClr val="C9D1D8"/>
-                      </a:solidFill>
-                      <a:prstDash val="solid"/>
-                      <a:round/>
-                      <a:headEnd type="none" w="med" len="med"/>
-                      <a:tailEnd type="none" w="med" len="med"/>
-                    </a:lnL>
-                    <a:lnR w="9525" cap="flat" cmpd="sng" algn="ctr">
-                      <a:solidFill>
-                        <a:srgbClr val="C9D1D8"/>
-                      </a:solidFill>
-                      <a:prstDash val="solid"/>
-                      <a:round/>
-                      <a:headEnd type="none" w="med" len="med"/>
-                      <a:tailEnd type="none" w="med" len="med"/>
-                    </a:lnR>
-                    <a:lnT w="9525" cap="flat" cmpd="sng" algn="ctr">
-                      <a:solidFill>
-                        <a:srgbClr val="C9D1D8"/>
-                      </a:solidFill>
-                      <a:prstDash val="solid"/>
-                      <a:round/>
-                      <a:headEnd type="none" w="med" len="med"/>
-                      <a:tailEnd type="none" w="med" len="med"/>
-                    </a:lnT>
-                    <a:lnB w="9525" cap="flat" cmpd="sng" algn="ctr">
-                      <a:solidFill>
-                        <a:srgbClr val="C9D1D8"/>
-                      </a:solidFill>
-                      <a:prstDash val="solid"/>
-                      <a:round/>
-                      <a:headEnd type="none" w="med" len="med"/>
-                      <a:tailEnd type="none" w="med" len="med"/>
-                    </a:lnB>
-                    <a:solidFill>
-                      <a:srgbClr val="FFFFFF"/>
-                    </a:solidFill>
-                  </a:tcPr>
-                </a:tc>
-                <a:tc>
-                  <a:txBody>
-                    <a:bodyPr/>
-                    <a:lstStyle/>
-                    <a:p>
-                      <a:pPr algn="l" indent="0" marL="0">
-                        <a:buNone/>
-                      </a:pPr>
-                      <a:r>
-                        <a:rPr lang="en-US" sz="1050" dirty="0">
-                          <a:solidFill>
-                            <a:srgbClr val="2E7D4F"/>
-                          </a:solidFill>
-                          <a:latin typeface="Calibri" pitchFamily="34" charset="0"/>
-                          <a:ea typeface="Calibri" pitchFamily="34" charset="-122"/>
-                          <a:cs typeface="Calibri" pitchFamily="34" charset="-120"/>
-                        </a:rPr>
-                        <a:t>yes</a:t>
-                      </a:r>
-                      <a:endParaRPr lang="en-US" sz="1050" dirty="0">
-                        <a:latin typeface="Calibri" charset="0"/>
-                        <a:ea typeface="Calibri" charset="0"/>
-                        <a:cs typeface="Calibri" charset="0"/>
-                      </a:endParaRPr>
-                    </a:p>
-                  </a:txBody>
-                  <a:tcPr marL="64008" marR="64008" marT="64008" marB="64008" anchor="ctr">
-                    <a:lnL w="9525" cap="flat" cmpd="sng" algn="ctr">
-                      <a:solidFill>
-                        <a:srgbClr val="C9D1D8"/>
-                      </a:solidFill>
-                      <a:prstDash val="solid"/>
-                      <a:round/>
-                      <a:headEnd type="none" w="med" len="med"/>
-                      <a:tailEnd type="none" w="med" len="med"/>
-                    </a:lnL>
-                    <a:lnR w="9525" cap="flat" cmpd="sng" algn="ctr">
-                      <a:solidFill>
-                        <a:srgbClr val="C9D1D8"/>
-                      </a:solidFill>
-                      <a:prstDash val="solid"/>
-                      <a:round/>
-                      <a:headEnd type="none" w="med" len="med"/>
-                      <a:tailEnd type="none" w="med" len="med"/>
-                    </a:lnR>
-                    <a:lnT w="9525" cap="flat" cmpd="sng" algn="ctr">
-                      <a:solidFill>
-                        <a:srgbClr val="C9D1D8"/>
-                      </a:solidFill>
-                      <a:prstDash val="solid"/>
-                      <a:round/>
-                      <a:headEnd type="none" w="med" len="med"/>
-                      <a:tailEnd type="none" w="med" len="med"/>
-                    </a:lnT>
-                    <a:lnB w="9525" cap="flat" cmpd="sng" algn="ctr">
-                      <a:solidFill>
-                        <a:srgbClr val="C9D1D8"/>
-                      </a:solidFill>
-                      <a:prstDash val="solid"/>
-                      <a:round/>
-                      <a:headEnd type="none" w="med" len="med"/>
-                      <a:tailEnd type="none" w="med" len="med"/>
-                    </a:lnB>
-                    <a:solidFill>
-                      <a:srgbClr val="FFFFFF"/>
-                    </a:solidFill>
-                  </a:tcPr>
-                </a:tc>
-              </a:tr>
             </a:tbl>
           </a:graphicData>
         </a:graphic>
@@ -31126,7 +30784,7 @@
                 <a:ea typeface="Calibri" pitchFamily="34" charset="-122"/>
                 <a:cs typeface="Calibri" pitchFamily="34" charset="-120"/>
               </a:rPr>
-              <a:t>6 design nodes over 3 cycles, every one marked suspect — the pattern was provisional until the third clean run promoted it (1 promotion, in trust_events).</a:t>
+              <a:t>4 design nodes over 2 cycles, every one marked suspect — the pattern stayed provisional: the front target was met after two clean runs, before the third that would promote it.</a:t>
             </a:r>
             <a:endParaRPr lang="en-US" sz="1050" dirty="0"/>
           </a:p>
@@ -31147,7 +30805,7 @@
                 <a:ea typeface="Calibri" pitchFamily="34" charset="-122"/>
                 <a:cs typeface="Calibri" pitchFamily="34" charset="-120"/>
               </a:rPr>
-              <a:t>Front of 4; the campaign stopped on "target front size 3 reached" rather than on budget.</a:t>
+              <a:t>Front of 3; the campaign stopped on "target front size 3 reached" rather than on budget.</a:t>
             </a:r>
             <a:endParaRPr lang="en-US" sz="1050" dirty="0"/>
           </a:p>
@@ -34735,7 +34393,7 @@
                 <a:ea typeface="Calibri" pitchFamily="34" charset="-122"/>
                 <a:cs typeface="Calibri" pitchFamily="34" charset="-120"/>
               </a:rPr>
-              <a:t>N consecutive clean runs promote; any failure demotes immediately and resets the counter.</a:t>
+              <a:t>N consecutive integrity-clean runs promote; any integrity failure demotes and resets the counter.</a:t>
             </a:r>
             <a:endParaRPr lang="en-US" sz="1000" dirty="0"/>
           </a:p>

--- a/agent/slides/impress-a-codewalk.pptx
+++ b/agent/slides/impress-a-codewalk.pptx
@@ -520,9 +520,9 @@
           <a:p>
             <a:r>
               <a:rPr lang="en-US" dirty="0"/>
-              <a:t>[0:45] A code walk, not a results talk. IMPRESS-A runs protein design campaigns on HPC: you give it a goal and a budget, and it decides what experiment to run next, composes a workflow out of a tool registry, runs it through asyncflow and rhapsody, and updates a population of candidates.
+              <a:t>[1:00] A code walk, not a results talk. IMPRESS-A runs protein design campaigns on HPC: you give it a goal and a budget, and it decides what experiment to run next, composes a workflow out of a tool registry, runs it through asyncflow and rhapsody, and updates a population of candidates.
 The word doing the work is composes. There is no fixed pipeline anywhere in this repository. Every experiment is a new graph no human has reviewed, and most of the code I will show you exists because of that one fact.
-When some of you last saw this, nothing real had ever run. Since then a six-stage campaign completed on Delta. I will walk the seam, show what four jobs cost us, and be precise about how little one completed campaign proves.</a:t>
+When some of you last saw this, nothing real had ever run. Since then a six-stage campaign completed on Delta, and the shape it ran earned enough trust to be admitted without a safety net. I will walk the seam, show what seven jobs cost us, and be precise about what that trust does and does not cover.</a:t>
             </a:r>
             <a:endParaRPr lang="en-US" dirty="0"/>
           </a:p>
@@ -794,12 +794,12 @@
           <a:p>
             <a:r>
               <a:rPr lang="en-US" dirty="0"/>
-              <a:t>[1:15] Four jobs to a completed campaign, and the figure is really about one variable.
+              <a:t>[1:35] Seven jobs, and the figure at the top is really about one variable.
 Top row, the HDD baseline. Diffusion 137 seconds, sequence design 293, and then packmin could not finish importing PyRosetta inside its three-hundred-second budget, so nothing downstream ran at all.
 Middle row, the same campaign with one thing changed: the virtual environment moved from HDD-backed Lustre to NVMe. Sequence design went from 293 seconds to 18, packmin from not finishing to sixteen.
 The reason is on the right. Importing PyRosetta off that filesystem costs 471 seconds — a 598-megabyte shared object, demand-paged. Torch is another 280. On NVMe both are seconds. That was the single largest cost this project was paying, and it was invisible because it looked like a tool timing out.
-It nearly caused a second bug, which is the more useful half. The queued fix was to raise three walltimes six-fold, which would have hidden the real cost behind timeouts far too large.
-Bottom right, the caveat for anyone reading our cost models. Diffusion took 146 seconds in one job and 45 in the next — same campaign, same parameters. These numbers feed gates that refuse graphs, so they sit deliberately above measurement and must not be tightened toward equality.</a:t>
+Bottom right, the caveat for anyone reading our cost models. Diffusion took 146 seconds in one job and 45 in the next — same campaign, same parameters. These numbers feed gates that refuse graphs, so they sit deliberately above measurement and must not be tightened toward equality.
+The table underneath is three later jobs that changed nothing about the science and asked one question: does the shape earn trust. The first ran thirty tasks out of thirty cleanly and promoted nothing, because we were counting design quality as evidence about the workflow. With only integrity gates counting, the same chain promoted after its second run in both later jobs — the green rows are graphs admitted with no dry-run and no cap.</a:t>
             </a:r>
             <a:endParaRPr lang="en-US" dirty="0"/>
           </a:p>
@@ -888,9 +888,8 @@
             <a:r>
               <a:rPr lang="en-US" dirty="0"/>
               <a:t>[1:20] Four defects reached real hardware, each invisible to a dry run. The pattern across them is more useful than any one.
-What a tool writes. Our glob for the diffusion output picked a trajectory rather than the design — same extension, and "denoised" sorts before the design's own name. A five-megabyte multi-frame stack went downstream as the backbone instead of a nineteen-kilobyte design.
-Whether a tool can import. LigandMPNN died in its module-level imports, before parsing a single argument we passed it. No flag or path we sent could ever have been read.
-Where the bytes live — the storage story from the last slide.
+The first two are in front of you. Read them as a pair: one picked the wrong file of the right extension, the other died in its module-level imports before parsing a single argument we passed it. No contract check we had could see either.
+Where the bytes live — the storage story from the last slide, and the queued fix for it was to raise three walltimes six-fold, which would have hidden the real cost behind timeouts far too large.
 And the subtle one: an estimate that refuses work. Our cost models were literature guesses six to sixty-nine times over reality, and gate five and the interlock cap refuse graphs against those numbers. The inflated GPU side summed past the cap, the chain was refused, and the policy truncated the last stage off — which happened to be the only producer of two of the four campaign objectives. The run was unwinnable from the moment it was admitted, and nothing said so.
 Two things to carry away. Checked against the binary is not executed. And a plausible explanation is not a diagnosis — the trajectory bug was a convincing cause for a failure it had nothing to do with, and only recovering the real stderr separated them.</a:t>
             </a:r>
@@ -980,12 +979,12 @@
           <a:p>
             <a:r>
               <a:rPr lang="en-US" dirty="0"/>
-              <a:t>[1:35] Two findings about the trust ledger, and the second is new as of building this deck.
-The first. The executor loaded the ledger from a path relative to the campaign root, and the Delta launcher changes directory into a per-job working directory before starting. So the ledger resolved inside each job and started empty every time. Two real runs left two files — one with zero clean runs, one with one — and promotion counts three consecutive clean runs within one file.
-What is worth your time is how it hid. Nothing ever logged where the ledger was, so a file that silently reset looks exactly like one that has not earned promotion yet — and I reported it that way. It had been true since the first Delta job, which means the trusted code path has never executed, and the ten percent cap has applied to every graph ever composed on real hardware. That cap is exactly what truncated the last stage off the chain twice.
-The second I hit while generating the numbers for this deck, and I have not changed the code. The signature emits one string per node and hashes the sorted join, so N lineages give N duplicate parts and the hash changes with the replica count — even though it deliberately does not change when you tune a parameter. The table shows the same chain hashing three ways at one, two and four replicas.
-The cost is concrete. The cheapest route to exercising four independent lineages was to promote the pattern with a one-replica campaign, then run four. It does not work: four replicas is a different, untrusted pattern, still capped, still refused, and the policy would quietly shrink it to three and run a weaker check than the one we asked for.
-So, genuinely open: is trust earned at one lineage evidence about four, when the cap it would lift exists to bound blast radius?</a:t>
+              <a:t>[1:50] Two findings about the trust ledger, and the second is still open.
+The first. The ledger path was relative to the campaign root and the Delta launcher changes into a per-job directory, so it resolved inside each job and started empty every time — while promotion counts three consecutive clean runs within one file.
+What is worth your time is how it hid. Nothing logged where the ledger was, so a file that silently reset looked exactly like one that had not earned promotion yet — and I reported it that way. It had been true since the first Delta job, which is why the trusted path did not execute until 22726105, and why the ten percent cap applied to every graph composed on real hardware before it. That cap is what truncated the last stage off the chain twice.
+The fix did more than stop the reset: the ledger is a site-wide log now, so evidence accumulates across jobs. The previous job's last event was clean, so promotion came a run early — and the job after that ran three trusted cycles with no demotion and no integrity failure.
+The second I hit while generating these numbers, and I have not changed the code. The signature emits one string per node, so N lineages give N duplicate parts and the hash moves with the replica count — though it deliberately does not move when you tune a parameter.
+The cost is concrete. The cheapest route to four independent lineages was to promote at one replica, then run four. It does not work: four is a different, untrusted pattern, still capped, still refused — and the policy would quietly shrink it to three. The question on the card is ask five.</a:t>
             </a:r>
             <a:endParaRPr lang="en-US" dirty="0"/>
           </a:p>
@@ -1163,10 +1162,10 @@
           <a:p>
             <a:r>
               <a:rPr lang="en-US" dirty="0"/>
-              <a:t>[1:00] I will not compress this slide, because an audience that catches you overclaiming stops believing everything else you said.
-Left, what genuinely runs. A real six-stage campaign on Delta. The engine — composition, gates, interlock, Pareto tree, provenance, a durable ledger. Four control models over one shared executor. The control plane in two transports, including a reasoner driving a campaign from another process. Both ends of the Dragon lifecycle bounded, each against a real lost allocation.
-Right, what has never run. Replicas greater than one — the invariant most likely to be silently wrong, because N replicas are supposed to be N independent lineages with different seeds, and the only evidence the seed plumbing does anything is that the nodes carry different metrics. Nothing has ever been promoted by the trust ledger. No measurement has superseded a prediction. No structural QC gate exists for any real tool. There is no resume. The headless control model fails open and reports itself as the wrong model.
-One campaign has completed. One lineage, one cycle, one draw.</a:t>
+              <a:t>[1:25] I will not compress this slide, because an audience that catches you overclaiming stops believing everything else you said.
+Left, what genuinely runs. A real six-stage campaign on Delta, and the shape it ran promoted and then held trust for three consecutive cycles with no safety net under it. The engine — composition, gates, interlock, Pareto tree, provenance, a durable ledger. Four control models over one shared executor. The control plane in two transports, including a reasoner driving a campaign from another process. Both ends of the Dragon lifecycle bounded, each against a real lost allocation.
+Right, what has never run. Replicas greater than one — the invariant most likely to be silently wrong, because N replicas are supposed to be N independent lineages with different seeds, and the only evidence the seed plumbing does anything is that the nodes carry different metrics. No node has reached a plain pass: five trusted nodes, five acceptance misses, at a thirty-one percent acceptance rate, which is a matter of draws rather than code. No measurement has superseded a prediction. No structural QC gate exists for any real tool. There is no resume. The headless control model fails open and reports itself as the wrong model.
+Sixteen complete runs, and the trusted path held. Every one of them was one lineage.</a:t>
             </a:r>
             <a:endParaRPr lang="en-US" dirty="0"/>
           </a:p>
@@ -1533,7 +1532,7 @@
               <a:t>[1:05] The shape of a campaign, and then what one actually produced.
 Across the top: a goal, a reasoner that decides, a composer that turns that into a typed DAG, admission, execution, absorption. Two edges make it a loop rather than a pipeline — a rejected graph comes back with a structured reason and another attempt, and every decision after the first sees every result so far.
 Left card, all measured. Six stages end to end in under three minutes: diffusion, sequence design, two Rosetta stages, a shape filter, a Boltz prediction. All four objectives came back with real values, admitted on the first attempt, cost measured per stage.
-Right card, because you would ask and I would rather say it first. One lineage, one cycle, one draw. Replicas greater than one has never run. The node is marked suspect rather than pass, because the pattern is still provisional — the interlock working, not a failure. And no measurement has ever superseded a prediction.
+Right card, because you would ask and I would rather say it first. Every run we have ever done is a single lineage. This node is suspect rather than pass because its pattern was provisional — the interlock working, not a failure — and no node has reached a plain pass since either, trusted ones included. And no measurement has ever superseded a prediction.
 Treat it as a floor. What it proves is that the plumbing survives contact with real tools.</a:t>
             </a:r>
             <a:endParaRPr lang="en-US" dirty="0"/>
@@ -3388,7 +3387,7 @@
                 <a:ea typeface="Calibri" pitchFamily="34" charset="-122"/>
                 <a:cs typeface="Calibri" pitchFamily="34" charset="-120"/>
               </a:rPr>
-              <a:t>— and what its first completed campaign on Delta did, and did not, prove</a:t>
+              <a:t>— and what its first completed campaign, and its first trusted ones, did and did not prove</a:t>
             </a:r>
             <a:endParaRPr lang="en-US" sz="1700" dirty="0"/>
           </a:p>
@@ -3427,7 +3426,7 @@
                 <a:ea typeface="Calibri" pitchFamily="34" charset="-122"/>
                 <a:cs typeface="Calibri" pitchFamily="34" charset="-120"/>
               </a:rPr>
-              <a:t>Job 22692304: six stages, 6/6 tasks ok in 2m53s, admitted on the first attempt, a one-node Pareto front carrying all four objectives</a:t>
+              <a:t>Job 22692304: six stages, 6/6 tasks ok in 2m53s, admitted on the first attempt, all four objectives valued. Job 22728140: the same shape promoted, then 3 consecutive trusted cycles with no demotion</a:t>
             </a:r>
             <a:endParaRPr lang="en-US" sz="1300" dirty="0"/>
           </a:p>
@@ -3466,7 +3465,7 @@
                 <a:ea typeface="Calibri" pitchFamily="34" charset="-122"/>
                 <a:cs typeface="Calibri" pitchFamily="34" charset="-120"/>
               </a:rPr>
-              <a:t>Lab code walk · main @ 7acce29 · 6.5k lines of source, 162 tests, 11 tools in 5 toolkits</a:t>
+              <a:t>Lab code walk · main @ 2debd76 · 6.6k lines of source, 165 tests, 11 tools in 5 toolkits</a:t>
             </a:r>
             <a:endParaRPr lang="en-US" sz="1200" dirty="0"/>
           </a:p>
@@ -8651,7 +8650,7 @@
                 <a:ea typeface="Cambria" pitchFamily="34" charset="-122"/>
                 <a:cs typeface="Cambria" pitchFamily="34" charset="-120"/>
               </a:rPr>
-              <a:t>Four jobs to one completed campaign</a:t>
+              <a:t>Seven jobs: what storage bought, and what trust cost</a:t>
             </a:r>
             <a:endParaRPr lang="en-US" sz="2800" dirty="0"/>
           </a:p>
@@ -10651,14 +10650,1345 @@
       </p:sp>
       <p:sp>
         <p:nvSpPr>
-          <p:cNvPr id="65" name="Text 63"/>
+          <p:cNvPr id="65" name="Shape 63"/>
+          <p:cNvSpPr/>
+          <p:nvPr/>
+        </p:nvSpPr>
+        <p:spPr>
+          <a:xfrm>
+            <a:off x="457200" y="3913632"/>
+            <a:ext cx="8229600" cy="292608"/>
+          </a:xfrm>
+          <a:prstGeom prst="rect">
+            <a:avLst/>
+          </a:prstGeom>
+          <a:solidFill>
+            <a:srgbClr val="2E7D5B"/>
+          </a:solidFill>
+          <a:ln w="12700">
+            <a:solidFill>
+              <a:srgbClr val="2E7D5B"/>
+            </a:solidFill>
+            <a:prstDash val="solid"/>
+          </a:ln>
+        </p:spPr>
+      </p:sp>
+      <p:sp>
+        <p:nvSpPr>
+          <p:cNvPr id="66" name="Text 64"/>
           <p:cNvSpPr txBox="1"/>
           <p:nvPr/>
         </p:nvSpPr>
         <p:spPr>
           <a:xfrm>
-            <a:off x="457200" y="6492240"/>
-            <a:ext cx="11277295" cy="228600"/>
+            <a:off x="566928" y="3913632"/>
+            <a:ext cx="8046720" cy="292608"/>
+          </a:xfrm>
+          <a:prstGeom prst="rect">
+            <a:avLst/>
+          </a:prstGeom>
+          <a:noFill/>
+          <a:ln/>
+        </p:spPr>
+        <p:txBody>
+          <a:bodyPr wrap="square" lIns="0" tIns="0" rIns="0" bIns="0" rtlCol="0" anchor="ctr"/>
+          <a:lstStyle/>
+          <a:p>
+            <a:pPr indent="0" marL="0">
+              <a:buNone/>
+            </a:pPr>
+            <a:r>
+              <a:rPr lang="en-US" sz="1100" b="1" dirty="0">
+                <a:solidFill>
+                  <a:srgbClr val="FFFFFF"/>
+                </a:solidFill>
+                <a:latin typeface="Calibri" pitchFamily="34" charset="0"/>
+                <a:ea typeface="Calibri" pitchFamily="34" charset="-122"/>
+                <a:cs typeface="Calibri" pitchFamily="34" charset="-120"/>
+              </a:rPr>
+              <a:t>Then three jobs about the SHAPE, not the science — 15 runs, 6/6 tasks every time</a:t>
+            </a:r>
+            <a:endParaRPr lang="en-US" sz="1100" dirty="0"/>
+          </a:p>
+        </p:txBody>
+      </p:sp>
+      <p:graphicFrame>
+        <p:nvGraphicFramePr>
+          <p:cNvPr id="13" name="Table 0"/>
+          <p:cNvGraphicFramePr>
+            <a:graphicFrameLocks noGrp="1"/>
+          </p:cNvGraphicFramePr>
+          <p:nvPr>
+            <p:extLst>
+              <p:ext uri="{D42A27DB-BD31-4B8C-83A1-F6EECF244321}">
+                <p14:modId xmlns:p14="http://schemas.microsoft.com/office/powerpoint/2010/main" val="1579011935"/>
+              </p:ext>
+            </p:extLst>
+          </p:nvPr>
+        </p:nvGraphicFramePr>
+        <p:xfrm>
+          <a:off x="457200" y="4242816"/>
+          <a:ext cx="8229600" cy="914400"/>
+        </p:xfrm>
+        <a:graphic>
+          <a:graphicData uri="http://schemas.openxmlformats.org/drawingml/2006/table">
+            <a:tbl>
+              <a:tblPr/>
+              <a:tblGrid>
+                <a:gridCol w="731520"/>
+                <a:gridCol w="3749040"/>
+                <a:gridCol w="3749040"/>
+              </a:tblGrid>
+              <a:tr h="237744">
+                <a:tc>
+                  <a:txBody>
+                    <a:bodyPr/>
+                    <a:lstStyle/>
+                    <a:p>
+                      <a:pPr indent="0" marL="0">
+                        <a:buNone/>
+                      </a:pPr>
+                      <a:r>
+                        <a:rPr lang="en-US" sz="1000" b="1" dirty="0">
+                          <a:solidFill>
+                            <a:srgbClr val="FFFFFF"/>
+                          </a:solidFill>
+                          <a:latin typeface="Calibri" pitchFamily="34" charset="0"/>
+                          <a:ea typeface="Calibri" pitchFamily="34" charset="-122"/>
+                          <a:cs typeface="Calibri" pitchFamily="34" charset="-120"/>
+                        </a:rPr>
+                        <a:t>run</a:t>
+                      </a:r>
+                      <a:endParaRPr lang="en-US" sz="1000" dirty="0">
+                        <a:latin typeface="Calibri" charset="0"/>
+                        <a:ea typeface="Calibri" charset="0"/>
+                        <a:cs typeface="Calibri" charset="0"/>
+                      </a:endParaRPr>
+                    </a:p>
+                  </a:txBody>
+                  <a:tcPr marL="64008" marR="64008" marT="64008" marB="64008" anchor="ctr">
+                    <a:lnL w="9525" cap="flat" cmpd="sng" algn="ctr">
+                      <a:solidFill>
+                        <a:srgbClr val="C9D1D8"/>
+                      </a:solidFill>
+                      <a:prstDash val="solid"/>
+                      <a:round/>
+                      <a:headEnd type="none" w="med" len="med"/>
+                      <a:tailEnd type="none" w="med" len="med"/>
+                    </a:lnL>
+                    <a:lnR w="9525" cap="flat" cmpd="sng" algn="ctr">
+                      <a:solidFill>
+                        <a:srgbClr val="C9D1D8"/>
+                      </a:solidFill>
+                      <a:prstDash val="solid"/>
+                      <a:round/>
+                      <a:headEnd type="none" w="med" len="med"/>
+                      <a:tailEnd type="none" w="med" len="med"/>
+                    </a:lnR>
+                    <a:lnT w="9525" cap="flat" cmpd="sng" algn="ctr">
+                      <a:solidFill>
+                        <a:srgbClr val="C9D1D8"/>
+                      </a:solidFill>
+                      <a:prstDash val="solid"/>
+                      <a:round/>
+                      <a:headEnd type="none" w="med" len="med"/>
+                      <a:tailEnd type="none" w="med" len="med"/>
+                    </a:lnT>
+                    <a:lnB w="9525" cap="flat" cmpd="sng" algn="ctr">
+                      <a:solidFill>
+                        <a:srgbClr val="C9D1D8"/>
+                      </a:solidFill>
+                      <a:prstDash val="solid"/>
+                      <a:round/>
+                      <a:headEnd type="none" w="med" len="med"/>
+                      <a:tailEnd type="none" w="med" len="med"/>
+                    </a:lnB>
+                    <a:solidFill>
+                      <a:srgbClr val="2E7D5B"/>
+                    </a:solidFill>
+                  </a:tcPr>
+                </a:tc>
+                <a:tc>
+                  <a:txBody>
+                    <a:bodyPr/>
+                    <a:lstStyle/>
+                    <a:p>
+                      <a:pPr indent="0" marL="0">
+                        <a:buNone/>
+                      </a:pPr>
+                      <a:r>
+                        <a:rPr lang="en-US" sz="1000" b="1" dirty="0">
+                          <a:solidFill>
+                            <a:srgbClr val="FFFFFF"/>
+                          </a:solidFill>
+                          <a:latin typeface="Calibri" pitchFamily="34" charset="0"/>
+                          <a:ea typeface="Calibri" pitchFamily="34" charset="-122"/>
+                          <a:cs typeface="Calibri" pitchFamily="34" charset="-120"/>
+                        </a:rPr>
+                        <a:t>22726105 · 13m41s</a:t>
+                      </a:r>
+                      <a:endParaRPr lang="en-US" sz="1000" dirty="0">
+                        <a:latin typeface="Calibri" charset="0"/>
+                        <a:ea typeface="Calibri" charset="0"/>
+                        <a:cs typeface="Calibri" charset="0"/>
+                      </a:endParaRPr>
+                    </a:p>
+                  </a:txBody>
+                  <a:tcPr marL="64008" marR="64008" marT="64008" marB="64008" anchor="ctr">
+                    <a:lnL w="9525" cap="flat" cmpd="sng" algn="ctr">
+                      <a:solidFill>
+                        <a:srgbClr val="C9D1D8"/>
+                      </a:solidFill>
+                      <a:prstDash val="solid"/>
+                      <a:round/>
+                      <a:headEnd type="none" w="med" len="med"/>
+                      <a:tailEnd type="none" w="med" len="med"/>
+                    </a:lnL>
+                    <a:lnR w="9525" cap="flat" cmpd="sng" algn="ctr">
+                      <a:solidFill>
+                        <a:srgbClr val="C9D1D8"/>
+                      </a:solidFill>
+                      <a:prstDash val="solid"/>
+                      <a:round/>
+                      <a:headEnd type="none" w="med" len="med"/>
+                      <a:tailEnd type="none" w="med" len="med"/>
+                    </a:lnR>
+                    <a:lnT w="9525" cap="flat" cmpd="sng" algn="ctr">
+                      <a:solidFill>
+                        <a:srgbClr val="C9D1D8"/>
+                      </a:solidFill>
+                      <a:prstDash val="solid"/>
+                      <a:round/>
+                      <a:headEnd type="none" w="med" len="med"/>
+                      <a:tailEnd type="none" w="med" len="med"/>
+                    </a:lnT>
+                    <a:lnB w="9525" cap="flat" cmpd="sng" algn="ctr">
+                      <a:solidFill>
+                        <a:srgbClr val="C9D1D8"/>
+                      </a:solidFill>
+                      <a:prstDash val="solid"/>
+                      <a:round/>
+                      <a:headEnd type="none" w="med" len="med"/>
+                      <a:tailEnd type="none" w="med" len="med"/>
+                    </a:lnB>
+                    <a:solidFill>
+                      <a:srgbClr val="2E7D5B"/>
+                    </a:solidFill>
+                  </a:tcPr>
+                </a:tc>
+                <a:tc>
+                  <a:txBody>
+                    <a:bodyPr/>
+                    <a:lstStyle/>
+                    <a:p>
+                      <a:pPr indent="0" marL="0">
+                        <a:buNone/>
+                      </a:pPr>
+                      <a:r>
+                        <a:rPr lang="en-US" sz="1000" b="1" dirty="0">
+                          <a:solidFill>
+                            <a:srgbClr val="FFFFFF"/>
+                          </a:solidFill>
+                          <a:latin typeface="Calibri" pitchFamily="34" charset="0"/>
+                          <a:ea typeface="Calibri" pitchFamily="34" charset="-122"/>
+                          <a:cs typeface="Calibri" pitchFamily="34" charset="-120"/>
+                        </a:rPr>
+                        <a:t>22728140 · 13m37s</a:t>
+                      </a:r>
+                      <a:endParaRPr lang="en-US" sz="1000" dirty="0">
+                        <a:latin typeface="Calibri" charset="0"/>
+                        <a:ea typeface="Calibri" charset="0"/>
+                        <a:cs typeface="Calibri" charset="0"/>
+                      </a:endParaRPr>
+                    </a:p>
+                  </a:txBody>
+                  <a:tcPr marL="64008" marR="64008" marT="64008" marB="64008" anchor="ctr">
+                    <a:lnL w="9525" cap="flat" cmpd="sng" algn="ctr">
+                      <a:solidFill>
+                        <a:srgbClr val="C9D1D8"/>
+                      </a:solidFill>
+                      <a:prstDash val="solid"/>
+                      <a:round/>
+                      <a:headEnd type="none" w="med" len="med"/>
+                      <a:tailEnd type="none" w="med" len="med"/>
+                    </a:lnL>
+                    <a:lnR w="9525" cap="flat" cmpd="sng" algn="ctr">
+                      <a:solidFill>
+                        <a:srgbClr val="C9D1D8"/>
+                      </a:solidFill>
+                      <a:prstDash val="solid"/>
+                      <a:round/>
+                      <a:headEnd type="none" w="med" len="med"/>
+                      <a:tailEnd type="none" w="med" len="med"/>
+                    </a:lnR>
+                    <a:lnT w="9525" cap="flat" cmpd="sng" algn="ctr">
+                      <a:solidFill>
+                        <a:srgbClr val="C9D1D8"/>
+                      </a:solidFill>
+                      <a:prstDash val="solid"/>
+                      <a:round/>
+                      <a:headEnd type="none" w="med" len="med"/>
+                      <a:tailEnd type="none" w="med" len="med"/>
+                    </a:lnT>
+                    <a:lnB w="9525" cap="flat" cmpd="sng" algn="ctr">
+                      <a:solidFill>
+                        <a:srgbClr val="C9D1D8"/>
+                      </a:solidFill>
+                      <a:prstDash val="solid"/>
+                      <a:round/>
+                      <a:headEnd type="none" w="med" len="med"/>
+                      <a:tailEnd type="none" w="med" len="med"/>
+                    </a:lnB>
+                    <a:solidFill>
+                      <a:srgbClr val="2E7D5B"/>
+                    </a:solidFill>
+                  </a:tcPr>
+                </a:tc>
+              </a:tr>
+              <a:tr h="237744">
+                <a:tc>
+                  <a:txBody>
+                    <a:bodyPr/>
+                    <a:lstStyle/>
+                    <a:p>
+                      <a:pPr algn="l" indent="0" marL="0">
+                        <a:buNone/>
+                      </a:pPr>
+                      <a:r>
+                        <a:rPr lang="en-US" sz="1000" b="1" dirty="0">
+                          <a:solidFill>
+                            <a:srgbClr val="22303C"/>
+                          </a:solidFill>
+                          <a:latin typeface="Calibri" pitchFamily="34" charset="0"/>
+                          <a:ea typeface="Calibri" pitchFamily="34" charset="-122"/>
+                          <a:cs typeface="Calibri" pitchFamily="34" charset="-120"/>
+                        </a:rPr>
+                        <a:t>r0001</a:t>
+                      </a:r>
+                      <a:endParaRPr lang="en-US" sz="1000" dirty="0">
+                        <a:latin typeface="Calibri" charset="0"/>
+                        <a:ea typeface="Calibri" charset="0"/>
+                        <a:cs typeface="Calibri" charset="0"/>
+                      </a:endParaRPr>
+                    </a:p>
+                  </a:txBody>
+                  <a:tcPr marL="64008" marR="64008" marT="64008" marB="64008" anchor="ctr">
+                    <a:lnL w="9525" cap="flat" cmpd="sng" algn="ctr">
+                      <a:solidFill>
+                        <a:srgbClr val="C9D1D8"/>
+                      </a:solidFill>
+                      <a:prstDash val="solid"/>
+                      <a:round/>
+                      <a:headEnd type="none" w="med" len="med"/>
+                      <a:tailEnd type="none" w="med" len="med"/>
+                    </a:lnL>
+                    <a:lnR w="9525" cap="flat" cmpd="sng" algn="ctr">
+                      <a:solidFill>
+                        <a:srgbClr val="C9D1D8"/>
+                      </a:solidFill>
+                      <a:prstDash val="solid"/>
+                      <a:round/>
+                      <a:headEnd type="none" w="med" len="med"/>
+                      <a:tailEnd type="none" w="med" len="med"/>
+                    </a:lnR>
+                    <a:lnT w="9525" cap="flat" cmpd="sng" algn="ctr">
+                      <a:solidFill>
+                        <a:srgbClr val="C9D1D8"/>
+                      </a:solidFill>
+                      <a:prstDash val="solid"/>
+                      <a:round/>
+                      <a:headEnd type="none" w="med" len="med"/>
+                      <a:tailEnd type="none" w="med" len="med"/>
+                    </a:lnT>
+                    <a:lnB w="9525" cap="flat" cmpd="sng" algn="ctr">
+                      <a:solidFill>
+                        <a:srgbClr val="C9D1D8"/>
+                      </a:solidFill>
+                      <a:prstDash val="solid"/>
+                      <a:round/>
+                      <a:headEnd type="none" w="med" len="med"/>
+                      <a:tailEnd type="none" w="med" len="med"/>
+                    </a:lnB>
+                    <a:solidFill>
+                      <a:srgbClr val="EEF2F5"/>
+                    </a:solidFill>
+                  </a:tcPr>
+                </a:tc>
+                <a:tc>
+                  <a:txBody>
+                    <a:bodyPr/>
+                    <a:lstStyle/>
+                    <a:p>
+                      <a:pPr algn="l" indent="0" marL="0">
+                        <a:buNone/>
+                      </a:pPr>
+                      <a:r>
+                        <a:rPr lang="en-US" sz="1000" dirty="0">
+                          <a:solidFill>
+                            <a:srgbClr val="22303C"/>
+                          </a:solidFill>
+                          <a:latin typeface="Calibri" pitchFamily="34" charset="0"/>
+                          <a:ea typeface="Calibri" pitchFamily="34" charset="-122"/>
+                          <a:cs typeface="Calibri" pitchFamily="34" charset="-120"/>
+                        </a:rPr>
+                        <a:t>provisional · clean</a:t>
+                      </a:r>
+                      <a:endParaRPr lang="en-US" sz="1000" dirty="0">
+                        <a:latin typeface="Calibri" charset="0"/>
+                        <a:ea typeface="Calibri" charset="0"/>
+                        <a:cs typeface="Calibri" charset="0"/>
+                      </a:endParaRPr>
+                    </a:p>
+                  </a:txBody>
+                  <a:tcPr marL="64008" marR="64008" marT="64008" marB="64008" anchor="ctr">
+                    <a:lnL w="9525" cap="flat" cmpd="sng" algn="ctr">
+                      <a:solidFill>
+                        <a:srgbClr val="C9D1D8"/>
+                      </a:solidFill>
+                      <a:prstDash val="solid"/>
+                      <a:round/>
+                      <a:headEnd type="none" w="med" len="med"/>
+                      <a:tailEnd type="none" w="med" len="med"/>
+                    </a:lnL>
+                    <a:lnR w="9525" cap="flat" cmpd="sng" algn="ctr">
+                      <a:solidFill>
+                        <a:srgbClr val="C9D1D8"/>
+                      </a:solidFill>
+                      <a:prstDash val="solid"/>
+                      <a:round/>
+                      <a:headEnd type="none" w="med" len="med"/>
+                      <a:tailEnd type="none" w="med" len="med"/>
+                    </a:lnR>
+                    <a:lnT w="9525" cap="flat" cmpd="sng" algn="ctr">
+                      <a:solidFill>
+                        <a:srgbClr val="C9D1D8"/>
+                      </a:solidFill>
+                      <a:prstDash val="solid"/>
+                      <a:round/>
+                      <a:headEnd type="none" w="med" len="med"/>
+                      <a:tailEnd type="none" w="med" len="med"/>
+                    </a:lnT>
+                    <a:lnB w="9525" cap="flat" cmpd="sng" algn="ctr">
+                      <a:solidFill>
+                        <a:srgbClr val="C9D1D8"/>
+                      </a:solidFill>
+                      <a:prstDash val="solid"/>
+                      <a:round/>
+                      <a:headEnd type="none" w="med" len="med"/>
+                      <a:tailEnd type="none" w="med" len="med"/>
+                    </a:lnB>
+                    <a:solidFill>
+                      <a:srgbClr val="EEF2F5"/>
+                    </a:solidFill>
+                  </a:tcPr>
+                </a:tc>
+                <a:tc>
+                  <a:txBody>
+                    <a:bodyPr/>
+                    <a:lstStyle/>
+                    <a:p>
+                      <a:pPr algn="l" indent="0" marL="0">
+                        <a:buNone/>
+                      </a:pPr>
+                      <a:r>
+                        <a:rPr lang="en-US" sz="1000" dirty="0">
+                          <a:solidFill>
+                            <a:srgbClr val="22303C"/>
+                          </a:solidFill>
+                          <a:latin typeface="Calibri" pitchFamily="34" charset="0"/>
+                          <a:ea typeface="Calibri" pitchFamily="34" charset="-122"/>
+                          <a:cs typeface="Calibri" pitchFamily="34" charset="-120"/>
+                        </a:rPr>
+                        <a:t>provisional · clean</a:t>
+                      </a:r>
+                      <a:endParaRPr lang="en-US" sz="1000" dirty="0">
+                        <a:latin typeface="Calibri" charset="0"/>
+                        <a:ea typeface="Calibri" charset="0"/>
+                        <a:cs typeface="Calibri" charset="0"/>
+                      </a:endParaRPr>
+                    </a:p>
+                  </a:txBody>
+                  <a:tcPr marL="64008" marR="64008" marT="64008" marB="64008" anchor="ctr">
+                    <a:lnL w="9525" cap="flat" cmpd="sng" algn="ctr">
+                      <a:solidFill>
+                        <a:srgbClr val="C9D1D8"/>
+                      </a:solidFill>
+                      <a:prstDash val="solid"/>
+                      <a:round/>
+                      <a:headEnd type="none" w="med" len="med"/>
+                      <a:tailEnd type="none" w="med" len="med"/>
+                    </a:lnL>
+                    <a:lnR w="9525" cap="flat" cmpd="sng" algn="ctr">
+                      <a:solidFill>
+                        <a:srgbClr val="C9D1D8"/>
+                      </a:solidFill>
+                      <a:prstDash val="solid"/>
+                      <a:round/>
+                      <a:headEnd type="none" w="med" len="med"/>
+                      <a:tailEnd type="none" w="med" len="med"/>
+                    </a:lnR>
+                    <a:lnT w="9525" cap="flat" cmpd="sng" algn="ctr">
+                      <a:solidFill>
+                        <a:srgbClr val="C9D1D8"/>
+                      </a:solidFill>
+                      <a:prstDash val="solid"/>
+                      <a:round/>
+                      <a:headEnd type="none" w="med" len="med"/>
+                      <a:tailEnd type="none" w="med" len="med"/>
+                    </a:lnT>
+                    <a:lnB w="9525" cap="flat" cmpd="sng" algn="ctr">
+                      <a:solidFill>
+                        <a:srgbClr val="C9D1D8"/>
+                      </a:solidFill>
+                      <a:prstDash val="solid"/>
+                      <a:round/>
+                      <a:headEnd type="none" w="med" len="med"/>
+                      <a:tailEnd type="none" w="med" len="med"/>
+                    </a:lnB>
+                    <a:solidFill>
+                      <a:srgbClr val="EEF2F5"/>
+                    </a:solidFill>
+                  </a:tcPr>
+                </a:tc>
+              </a:tr>
+              <a:tr h="237744">
+                <a:tc>
+                  <a:txBody>
+                    <a:bodyPr/>
+                    <a:lstStyle/>
+                    <a:p>
+                      <a:pPr algn="l" indent="0" marL="0">
+                        <a:buNone/>
+                      </a:pPr>
+                      <a:r>
+                        <a:rPr lang="en-US" sz="1000" b="1" dirty="0">
+                          <a:solidFill>
+                            <a:srgbClr val="22303C"/>
+                          </a:solidFill>
+                          <a:latin typeface="Calibri" pitchFamily="34" charset="0"/>
+                          <a:ea typeface="Calibri" pitchFamily="34" charset="-122"/>
+                          <a:cs typeface="Calibri" pitchFamily="34" charset="-120"/>
+                        </a:rPr>
+                        <a:t>r0002</a:t>
+                      </a:r>
+                      <a:endParaRPr lang="en-US" sz="1000" dirty="0">
+                        <a:latin typeface="Calibri" charset="0"/>
+                        <a:ea typeface="Calibri" charset="0"/>
+                        <a:cs typeface="Calibri" charset="0"/>
+                      </a:endParaRPr>
+                    </a:p>
+                  </a:txBody>
+                  <a:tcPr marL="64008" marR="64008" marT="64008" marB="64008" anchor="ctr">
+                    <a:lnL w="9525" cap="flat" cmpd="sng" algn="ctr">
+                      <a:solidFill>
+                        <a:srgbClr val="C9D1D8"/>
+                      </a:solidFill>
+                      <a:prstDash val="solid"/>
+                      <a:round/>
+                      <a:headEnd type="none" w="med" len="med"/>
+                      <a:tailEnd type="none" w="med" len="med"/>
+                    </a:lnL>
+                    <a:lnR w="9525" cap="flat" cmpd="sng" algn="ctr">
+                      <a:solidFill>
+                        <a:srgbClr val="C9D1D8"/>
+                      </a:solidFill>
+                      <a:prstDash val="solid"/>
+                      <a:round/>
+                      <a:headEnd type="none" w="med" len="med"/>
+                      <a:tailEnd type="none" w="med" len="med"/>
+                    </a:lnR>
+                    <a:lnT w="9525" cap="flat" cmpd="sng" algn="ctr">
+                      <a:solidFill>
+                        <a:srgbClr val="C9D1D8"/>
+                      </a:solidFill>
+                      <a:prstDash val="solid"/>
+                      <a:round/>
+                      <a:headEnd type="none" w="med" len="med"/>
+                      <a:tailEnd type="none" w="med" len="med"/>
+                    </a:lnT>
+                    <a:lnB w="9525" cap="flat" cmpd="sng" algn="ctr">
+                      <a:solidFill>
+                        <a:srgbClr val="C9D1D8"/>
+                      </a:solidFill>
+                      <a:prstDash val="solid"/>
+                      <a:round/>
+                      <a:headEnd type="none" w="med" len="med"/>
+                      <a:tailEnd type="none" w="med" len="med"/>
+                    </a:lnB>
+                    <a:solidFill>
+                      <a:srgbClr val="FFFFFF"/>
+                    </a:solidFill>
+                  </a:tcPr>
+                </a:tc>
+                <a:tc>
+                  <a:txBody>
+                    <a:bodyPr/>
+                    <a:lstStyle/>
+                    <a:p>
+                      <a:pPr algn="l" indent="0" marL="0">
+                        <a:buNone/>
+                      </a:pPr>
+                      <a:r>
+                        <a:rPr lang="en-US" sz="1000" dirty="0">
+                          <a:solidFill>
+                            <a:srgbClr val="22303C"/>
+                          </a:solidFill>
+                          <a:latin typeface="Calibri" pitchFamily="34" charset="0"/>
+                          <a:ea typeface="Calibri" pitchFamily="34" charset="-122"/>
+                          <a:cs typeface="Calibri" pitchFamily="34" charset="-120"/>
+                        </a:rPr>
+                        <a:t>provisional · clean → PROMOTED</a:t>
+                      </a:r>
+                      <a:endParaRPr lang="en-US" sz="1000" dirty="0">
+                        <a:latin typeface="Calibri" charset="0"/>
+                        <a:ea typeface="Calibri" charset="0"/>
+                        <a:cs typeface="Calibri" charset="0"/>
+                      </a:endParaRPr>
+                    </a:p>
+                  </a:txBody>
+                  <a:tcPr marL="64008" marR="64008" marT="64008" marB="64008" anchor="ctr">
+                    <a:lnL w="9525" cap="flat" cmpd="sng" algn="ctr">
+                      <a:solidFill>
+                        <a:srgbClr val="C9D1D8"/>
+                      </a:solidFill>
+                      <a:prstDash val="solid"/>
+                      <a:round/>
+                      <a:headEnd type="none" w="med" len="med"/>
+                      <a:tailEnd type="none" w="med" len="med"/>
+                    </a:lnL>
+                    <a:lnR w="9525" cap="flat" cmpd="sng" algn="ctr">
+                      <a:solidFill>
+                        <a:srgbClr val="C9D1D8"/>
+                      </a:solidFill>
+                      <a:prstDash val="solid"/>
+                      <a:round/>
+                      <a:headEnd type="none" w="med" len="med"/>
+                      <a:tailEnd type="none" w="med" len="med"/>
+                    </a:lnR>
+                    <a:lnT w="9525" cap="flat" cmpd="sng" algn="ctr">
+                      <a:solidFill>
+                        <a:srgbClr val="C9D1D8"/>
+                      </a:solidFill>
+                      <a:prstDash val="solid"/>
+                      <a:round/>
+                      <a:headEnd type="none" w="med" len="med"/>
+                      <a:tailEnd type="none" w="med" len="med"/>
+                    </a:lnT>
+                    <a:lnB w="9525" cap="flat" cmpd="sng" algn="ctr">
+                      <a:solidFill>
+                        <a:srgbClr val="C9D1D8"/>
+                      </a:solidFill>
+                      <a:prstDash val="solid"/>
+                      <a:round/>
+                      <a:headEnd type="none" w="med" len="med"/>
+                      <a:tailEnd type="none" w="med" len="med"/>
+                    </a:lnB>
+                    <a:solidFill>
+                      <a:srgbClr val="FFFFFF"/>
+                    </a:solidFill>
+                  </a:tcPr>
+                </a:tc>
+                <a:tc>
+                  <a:txBody>
+                    <a:bodyPr/>
+                    <a:lstStyle/>
+                    <a:p>
+                      <a:pPr algn="l" indent="0" marL="0">
+                        <a:buNone/>
+                      </a:pPr>
+                      <a:r>
+                        <a:rPr lang="en-US" sz="1000" dirty="0">
+                          <a:solidFill>
+                            <a:srgbClr val="22303C"/>
+                          </a:solidFill>
+                          <a:latin typeface="Calibri" pitchFamily="34" charset="0"/>
+                          <a:ea typeface="Calibri" pitchFamily="34" charset="-122"/>
+                          <a:cs typeface="Calibri" pitchFamily="34" charset="-120"/>
+                        </a:rPr>
+                        <a:t>provisional · clean → PROMOTED</a:t>
+                      </a:r>
+                      <a:endParaRPr lang="en-US" sz="1000" dirty="0">
+                        <a:latin typeface="Calibri" charset="0"/>
+                        <a:ea typeface="Calibri" charset="0"/>
+                        <a:cs typeface="Calibri" charset="0"/>
+                      </a:endParaRPr>
+                    </a:p>
+                  </a:txBody>
+                  <a:tcPr marL="64008" marR="64008" marT="64008" marB="64008" anchor="ctr">
+                    <a:lnL w="9525" cap="flat" cmpd="sng" algn="ctr">
+                      <a:solidFill>
+                        <a:srgbClr val="C9D1D8"/>
+                      </a:solidFill>
+                      <a:prstDash val="solid"/>
+                      <a:round/>
+                      <a:headEnd type="none" w="med" len="med"/>
+                      <a:tailEnd type="none" w="med" len="med"/>
+                    </a:lnL>
+                    <a:lnR w="9525" cap="flat" cmpd="sng" algn="ctr">
+                      <a:solidFill>
+                        <a:srgbClr val="C9D1D8"/>
+                      </a:solidFill>
+                      <a:prstDash val="solid"/>
+                      <a:round/>
+                      <a:headEnd type="none" w="med" len="med"/>
+                      <a:tailEnd type="none" w="med" len="med"/>
+                    </a:lnR>
+                    <a:lnT w="9525" cap="flat" cmpd="sng" algn="ctr">
+                      <a:solidFill>
+                        <a:srgbClr val="C9D1D8"/>
+                      </a:solidFill>
+                      <a:prstDash val="solid"/>
+                      <a:round/>
+                      <a:headEnd type="none" w="med" len="med"/>
+                      <a:tailEnd type="none" w="med" len="med"/>
+                    </a:lnT>
+                    <a:lnB w="9525" cap="flat" cmpd="sng" algn="ctr">
+                      <a:solidFill>
+                        <a:srgbClr val="C9D1D8"/>
+                      </a:solidFill>
+                      <a:prstDash val="solid"/>
+                      <a:round/>
+                      <a:headEnd type="none" w="med" len="med"/>
+                      <a:tailEnd type="none" w="med" len="med"/>
+                    </a:lnB>
+                    <a:solidFill>
+                      <a:srgbClr val="FFFFFF"/>
+                    </a:solidFill>
+                  </a:tcPr>
+                </a:tc>
+              </a:tr>
+              <a:tr h="237744">
+                <a:tc>
+                  <a:txBody>
+                    <a:bodyPr/>
+                    <a:lstStyle/>
+                    <a:p>
+                      <a:pPr algn="l" indent="0" marL="0">
+                        <a:buNone/>
+                      </a:pPr>
+                      <a:r>
+                        <a:rPr lang="en-US" sz="1000" b="1" dirty="0">
+                          <a:solidFill>
+                            <a:srgbClr val="22303C"/>
+                          </a:solidFill>
+                          <a:latin typeface="Calibri" pitchFamily="34" charset="0"/>
+                          <a:ea typeface="Calibri" pitchFamily="34" charset="-122"/>
+                          <a:cs typeface="Calibri" pitchFamily="34" charset="-120"/>
+                        </a:rPr>
+                        <a:t>r0003</a:t>
+                      </a:r>
+                      <a:endParaRPr lang="en-US" sz="1000" dirty="0">
+                        <a:latin typeface="Calibri" charset="0"/>
+                        <a:ea typeface="Calibri" charset="0"/>
+                        <a:cs typeface="Calibri" charset="0"/>
+                      </a:endParaRPr>
+                    </a:p>
+                  </a:txBody>
+                  <a:tcPr marL="64008" marR="64008" marT="64008" marB="64008" anchor="ctr">
+                    <a:lnL w="9525" cap="flat" cmpd="sng" algn="ctr">
+                      <a:solidFill>
+                        <a:srgbClr val="C9D1D8"/>
+                      </a:solidFill>
+                      <a:prstDash val="solid"/>
+                      <a:round/>
+                      <a:headEnd type="none" w="med" len="med"/>
+                      <a:tailEnd type="none" w="med" len="med"/>
+                    </a:lnL>
+                    <a:lnR w="9525" cap="flat" cmpd="sng" algn="ctr">
+                      <a:solidFill>
+                        <a:srgbClr val="C9D1D8"/>
+                      </a:solidFill>
+                      <a:prstDash val="solid"/>
+                      <a:round/>
+                      <a:headEnd type="none" w="med" len="med"/>
+                      <a:tailEnd type="none" w="med" len="med"/>
+                    </a:lnR>
+                    <a:lnT w="9525" cap="flat" cmpd="sng" algn="ctr">
+                      <a:solidFill>
+                        <a:srgbClr val="C9D1D8"/>
+                      </a:solidFill>
+                      <a:prstDash val="solid"/>
+                      <a:round/>
+                      <a:headEnd type="none" w="med" len="med"/>
+                      <a:tailEnd type="none" w="med" len="med"/>
+                    </a:lnT>
+                    <a:lnB w="9525" cap="flat" cmpd="sng" algn="ctr">
+                      <a:solidFill>
+                        <a:srgbClr val="C9D1D8"/>
+                      </a:solidFill>
+                      <a:prstDash val="solid"/>
+                      <a:round/>
+                      <a:headEnd type="none" w="med" len="med"/>
+                      <a:tailEnd type="none" w="med" len="med"/>
+                    </a:lnB>
+                    <a:solidFill>
+                      <a:srgbClr val="EEF2F5"/>
+                    </a:solidFill>
+                  </a:tcPr>
+                </a:tc>
+                <a:tc>
+                  <a:txBody>
+                    <a:bodyPr/>
+                    <a:lstStyle/>
+                    <a:p>
+                      <a:pPr algn="l" indent="0" marL="0">
+                        <a:buNone/>
+                      </a:pPr>
+                      <a:r>
+                        <a:rPr lang="en-US" sz="1000" b="1" dirty="0">
+                          <a:solidFill>
+                            <a:srgbClr val="2E7D4F"/>
+                          </a:solidFill>
+                          <a:latin typeface="Calibri" pitchFamily="34" charset="0"/>
+                          <a:ea typeface="Calibri" pitchFamily="34" charset="-122"/>
+                          <a:cs typeface="Calibri" pitchFamily="34" charset="-120"/>
+                        </a:rPr>
+                        <a:t>trusted · fail (acceptance)</a:t>
+                      </a:r>
+                      <a:endParaRPr lang="en-US" sz="1000" dirty="0">
+                        <a:latin typeface="Calibri" charset="0"/>
+                        <a:ea typeface="Calibri" charset="0"/>
+                        <a:cs typeface="Calibri" charset="0"/>
+                      </a:endParaRPr>
+                    </a:p>
+                  </a:txBody>
+                  <a:tcPr marL="64008" marR="64008" marT="64008" marB="64008" anchor="ctr">
+                    <a:lnL w="9525" cap="flat" cmpd="sng" algn="ctr">
+                      <a:solidFill>
+                        <a:srgbClr val="C9D1D8"/>
+                      </a:solidFill>
+                      <a:prstDash val="solid"/>
+                      <a:round/>
+                      <a:headEnd type="none" w="med" len="med"/>
+                      <a:tailEnd type="none" w="med" len="med"/>
+                    </a:lnL>
+                    <a:lnR w="9525" cap="flat" cmpd="sng" algn="ctr">
+                      <a:solidFill>
+                        <a:srgbClr val="C9D1D8"/>
+                      </a:solidFill>
+                      <a:prstDash val="solid"/>
+                      <a:round/>
+                      <a:headEnd type="none" w="med" len="med"/>
+                      <a:tailEnd type="none" w="med" len="med"/>
+                    </a:lnR>
+                    <a:lnT w="9525" cap="flat" cmpd="sng" algn="ctr">
+                      <a:solidFill>
+                        <a:srgbClr val="C9D1D8"/>
+                      </a:solidFill>
+                      <a:prstDash val="solid"/>
+                      <a:round/>
+                      <a:headEnd type="none" w="med" len="med"/>
+                      <a:tailEnd type="none" w="med" len="med"/>
+                    </a:lnT>
+                    <a:lnB w="9525" cap="flat" cmpd="sng" algn="ctr">
+                      <a:solidFill>
+                        <a:srgbClr val="C9D1D8"/>
+                      </a:solidFill>
+                      <a:prstDash val="solid"/>
+                      <a:round/>
+                      <a:headEnd type="none" w="med" len="med"/>
+                      <a:tailEnd type="none" w="med" len="med"/>
+                    </a:lnB>
+                    <a:solidFill>
+                      <a:srgbClr val="EEF2F5"/>
+                    </a:solidFill>
+                  </a:tcPr>
+                </a:tc>
+                <a:tc>
+                  <a:txBody>
+                    <a:bodyPr/>
+                    <a:lstStyle/>
+                    <a:p>
+                      <a:pPr algn="l" indent="0" marL="0">
+                        <a:buNone/>
+                      </a:pPr>
+                      <a:r>
+                        <a:rPr lang="en-US" sz="1000" b="1" dirty="0">
+                          <a:solidFill>
+                            <a:srgbClr val="2E7D4F"/>
+                          </a:solidFill>
+                          <a:latin typeface="Calibri" pitchFamily="34" charset="0"/>
+                          <a:ea typeface="Calibri" pitchFamily="34" charset="-122"/>
+                          <a:cs typeface="Calibri" pitchFamily="34" charset="-120"/>
+                        </a:rPr>
+                        <a:t>trusted · fail (acceptance)</a:t>
+                      </a:r>
+                      <a:endParaRPr lang="en-US" sz="1000" dirty="0">
+                        <a:latin typeface="Calibri" charset="0"/>
+                        <a:ea typeface="Calibri" charset="0"/>
+                        <a:cs typeface="Calibri" charset="0"/>
+                      </a:endParaRPr>
+                    </a:p>
+                  </a:txBody>
+                  <a:tcPr marL="64008" marR="64008" marT="64008" marB="64008" anchor="ctr">
+                    <a:lnL w="9525" cap="flat" cmpd="sng" algn="ctr">
+                      <a:solidFill>
+                        <a:srgbClr val="C9D1D8"/>
+                      </a:solidFill>
+                      <a:prstDash val="solid"/>
+                      <a:round/>
+                      <a:headEnd type="none" w="med" len="med"/>
+                      <a:tailEnd type="none" w="med" len="med"/>
+                    </a:lnL>
+                    <a:lnR w="9525" cap="flat" cmpd="sng" algn="ctr">
+                      <a:solidFill>
+                        <a:srgbClr val="C9D1D8"/>
+                      </a:solidFill>
+                      <a:prstDash val="solid"/>
+                      <a:round/>
+                      <a:headEnd type="none" w="med" len="med"/>
+                      <a:tailEnd type="none" w="med" len="med"/>
+                    </a:lnR>
+                    <a:lnT w="9525" cap="flat" cmpd="sng" algn="ctr">
+                      <a:solidFill>
+                        <a:srgbClr val="C9D1D8"/>
+                      </a:solidFill>
+                      <a:prstDash val="solid"/>
+                      <a:round/>
+                      <a:headEnd type="none" w="med" len="med"/>
+                      <a:tailEnd type="none" w="med" len="med"/>
+                    </a:lnT>
+                    <a:lnB w="9525" cap="flat" cmpd="sng" algn="ctr">
+                      <a:solidFill>
+                        <a:srgbClr val="C9D1D8"/>
+                      </a:solidFill>
+                      <a:prstDash val="solid"/>
+                      <a:round/>
+                      <a:headEnd type="none" w="med" len="med"/>
+                      <a:tailEnd type="none" w="med" len="med"/>
+                    </a:lnB>
+                    <a:solidFill>
+                      <a:srgbClr val="EEF2F5"/>
+                    </a:solidFill>
+                  </a:tcPr>
+                </a:tc>
+              </a:tr>
+              <a:tr h="237744">
+                <a:tc>
+                  <a:txBody>
+                    <a:bodyPr/>
+                    <a:lstStyle/>
+                    <a:p>
+                      <a:pPr algn="l" indent="0" marL="0">
+                        <a:buNone/>
+                      </a:pPr>
+                      <a:r>
+                        <a:rPr lang="en-US" sz="1000" b="1" dirty="0">
+                          <a:solidFill>
+                            <a:srgbClr val="22303C"/>
+                          </a:solidFill>
+                          <a:latin typeface="Calibri" pitchFamily="34" charset="0"/>
+                          <a:ea typeface="Calibri" pitchFamily="34" charset="-122"/>
+                          <a:cs typeface="Calibri" pitchFamily="34" charset="-120"/>
+                        </a:rPr>
+                        <a:t>r0004</a:t>
+                      </a:r>
+                      <a:endParaRPr lang="en-US" sz="1000" dirty="0">
+                        <a:latin typeface="Calibri" charset="0"/>
+                        <a:ea typeface="Calibri" charset="0"/>
+                        <a:cs typeface="Calibri" charset="0"/>
+                      </a:endParaRPr>
+                    </a:p>
+                  </a:txBody>
+                  <a:tcPr marL="64008" marR="64008" marT="64008" marB="64008" anchor="ctr">
+                    <a:lnL w="9525" cap="flat" cmpd="sng" algn="ctr">
+                      <a:solidFill>
+                        <a:srgbClr val="C9D1D8"/>
+                      </a:solidFill>
+                      <a:prstDash val="solid"/>
+                      <a:round/>
+                      <a:headEnd type="none" w="med" len="med"/>
+                      <a:tailEnd type="none" w="med" len="med"/>
+                    </a:lnL>
+                    <a:lnR w="9525" cap="flat" cmpd="sng" algn="ctr">
+                      <a:solidFill>
+                        <a:srgbClr val="C9D1D8"/>
+                      </a:solidFill>
+                      <a:prstDash val="solid"/>
+                      <a:round/>
+                      <a:headEnd type="none" w="med" len="med"/>
+                      <a:tailEnd type="none" w="med" len="med"/>
+                    </a:lnR>
+                    <a:lnT w="9525" cap="flat" cmpd="sng" algn="ctr">
+                      <a:solidFill>
+                        <a:srgbClr val="C9D1D8"/>
+                      </a:solidFill>
+                      <a:prstDash val="solid"/>
+                      <a:round/>
+                      <a:headEnd type="none" w="med" len="med"/>
+                      <a:tailEnd type="none" w="med" len="med"/>
+                    </a:lnT>
+                    <a:lnB w="9525" cap="flat" cmpd="sng" algn="ctr">
+                      <a:solidFill>
+                        <a:srgbClr val="C9D1D8"/>
+                      </a:solidFill>
+                      <a:prstDash val="solid"/>
+                      <a:round/>
+                      <a:headEnd type="none" w="med" len="med"/>
+                      <a:tailEnd type="none" w="med" len="med"/>
+                    </a:lnB>
+                    <a:solidFill>
+                      <a:srgbClr val="FFFFFF"/>
+                    </a:solidFill>
+                  </a:tcPr>
+                </a:tc>
+                <a:tc>
+                  <a:txBody>
+                    <a:bodyPr/>
+                    <a:lstStyle/>
+                    <a:p>
+                      <a:pPr algn="l" indent="0" marL="0">
+                        <a:buNone/>
+                      </a:pPr>
+                      <a:r>
+                        <a:rPr lang="en-US" sz="1000" b="1" dirty="0">
+                          <a:solidFill>
+                            <a:srgbClr val="C0392B"/>
+                          </a:solidFill>
+                          <a:latin typeface="Calibri" pitchFamily="34" charset="0"/>
+                          <a:ea typeface="Calibri" pitchFamily="34" charset="-122"/>
+                          <a:cs typeface="Calibri" pitchFamily="34" charset="-120"/>
+                        </a:rPr>
+                        <a:t>trusted · INTEGRITY fail → demoted</a:t>
+                      </a:r>
+                      <a:endParaRPr lang="en-US" sz="1000" dirty="0">
+                        <a:latin typeface="Calibri" charset="0"/>
+                        <a:ea typeface="Calibri" charset="0"/>
+                        <a:cs typeface="Calibri" charset="0"/>
+                      </a:endParaRPr>
+                    </a:p>
+                  </a:txBody>
+                  <a:tcPr marL="64008" marR="64008" marT="64008" marB="64008" anchor="ctr">
+                    <a:lnL w="9525" cap="flat" cmpd="sng" algn="ctr">
+                      <a:solidFill>
+                        <a:srgbClr val="C9D1D8"/>
+                      </a:solidFill>
+                      <a:prstDash val="solid"/>
+                      <a:round/>
+                      <a:headEnd type="none" w="med" len="med"/>
+                      <a:tailEnd type="none" w="med" len="med"/>
+                    </a:lnL>
+                    <a:lnR w="9525" cap="flat" cmpd="sng" algn="ctr">
+                      <a:solidFill>
+                        <a:srgbClr val="C9D1D8"/>
+                      </a:solidFill>
+                      <a:prstDash val="solid"/>
+                      <a:round/>
+                      <a:headEnd type="none" w="med" len="med"/>
+                      <a:tailEnd type="none" w="med" len="med"/>
+                    </a:lnR>
+                    <a:lnT w="9525" cap="flat" cmpd="sng" algn="ctr">
+                      <a:solidFill>
+                        <a:srgbClr val="C9D1D8"/>
+                      </a:solidFill>
+                      <a:prstDash val="solid"/>
+                      <a:round/>
+                      <a:headEnd type="none" w="med" len="med"/>
+                      <a:tailEnd type="none" w="med" len="med"/>
+                    </a:lnT>
+                    <a:lnB w="9525" cap="flat" cmpd="sng" algn="ctr">
+                      <a:solidFill>
+                        <a:srgbClr val="C9D1D8"/>
+                      </a:solidFill>
+                      <a:prstDash val="solid"/>
+                      <a:round/>
+                      <a:headEnd type="none" w="med" len="med"/>
+                      <a:tailEnd type="none" w="med" len="med"/>
+                    </a:lnB>
+                    <a:solidFill>
+                      <a:srgbClr val="FFFFFF"/>
+                    </a:solidFill>
+                  </a:tcPr>
+                </a:tc>
+                <a:tc>
+                  <a:txBody>
+                    <a:bodyPr/>
+                    <a:lstStyle/>
+                    <a:p>
+                      <a:pPr algn="l" indent="0" marL="0">
+                        <a:buNone/>
+                      </a:pPr>
+                      <a:r>
+                        <a:rPr lang="en-US" sz="1000" b="1" dirty="0">
+                          <a:solidFill>
+                            <a:srgbClr val="2E7D4F"/>
+                          </a:solidFill>
+                          <a:latin typeface="Calibri" pitchFamily="34" charset="0"/>
+                          <a:ea typeface="Calibri" pitchFamily="34" charset="-122"/>
+                          <a:cs typeface="Calibri" pitchFamily="34" charset="-120"/>
+                        </a:rPr>
+                        <a:t>trusted · fail (acceptance)</a:t>
+                      </a:r>
+                      <a:endParaRPr lang="en-US" sz="1000" dirty="0">
+                        <a:latin typeface="Calibri" charset="0"/>
+                        <a:ea typeface="Calibri" charset="0"/>
+                        <a:cs typeface="Calibri" charset="0"/>
+                      </a:endParaRPr>
+                    </a:p>
+                  </a:txBody>
+                  <a:tcPr marL="64008" marR="64008" marT="64008" marB="64008" anchor="ctr">
+                    <a:lnL w="9525" cap="flat" cmpd="sng" algn="ctr">
+                      <a:solidFill>
+                        <a:srgbClr val="C9D1D8"/>
+                      </a:solidFill>
+                      <a:prstDash val="solid"/>
+                      <a:round/>
+                      <a:headEnd type="none" w="med" len="med"/>
+                      <a:tailEnd type="none" w="med" len="med"/>
+                    </a:lnL>
+                    <a:lnR w="9525" cap="flat" cmpd="sng" algn="ctr">
+                      <a:solidFill>
+                        <a:srgbClr val="C9D1D8"/>
+                      </a:solidFill>
+                      <a:prstDash val="solid"/>
+                      <a:round/>
+                      <a:headEnd type="none" w="med" len="med"/>
+                      <a:tailEnd type="none" w="med" len="med"/>
+                    </a:lnR>
+                    <a:lnT w="9525" cap="flat" cmpd="sng" algn="ctr">
+                      <a:solidFill>
+                        <a:srgbClr val="C9D1D8"/>
+                      </a:solidFill>
+                      <a:prstDash val="solid"/>
+                      <a:round/>
+                      <a:headEnd type="none" w="med" len="med"/>
+                      <a:tailEnd type="none" w="med" len="med"/>
+                    </a:lnT>
+                    <a:lnB w="9525" cap="flat" cmpd="sng" algn="ctr">
+                      <a:solidFill>
+                        <a:srgbClr val="C9D1D8"/>
+                      </a:solidFill>
+                      <a:prstDash val="solid"/>
+                      <a:round/>
+                      <a:headEnd type="none" w="med" len="med"/>
+                      <a:tailEnd type="none" w="med" len="med"/>
+                    </a:lnB>
+                    <a:solidFill>
+                      <a:srgbClr val="FFFFFF"/>
+                    </a:solidFill>
+                  </a:tcPr>
+                </a:tc>
+              </a:tr>
+              <a:tr h="237744">
+                <a:tc>
+                  <a:txBody>
+                    <a:bodyPr/>
+                    <a:lstStyle/>
+                    <a:p>
+                      <a:pPr algn="l" indent="0" marL="0">
+                        <a:buNone/>
+                      </a:pPr>
+                      <a:r>
+                        <a:rPr lang="en-US" sz="1000" b="1" dirty="0">
+                          <a:solidFill>
+                            <a:srgbClr val="22303C"/>
+                          </a:solidFill>
+                          <a:latin typeface="Calibri" pitchFamily="34" charset="0"/>
+                          <a:ea typeface="Calibri" pitchFamily="34" charset="-122"/>
+                          <a:cs typeface="Calibri" pitchFamily="34" charset="-120"/>
+                        </a:rPr>
+                        <a:t>r0005</a:t>
+                      </a:r>
+                      <a:endParaRPr lang="en-US" sz="1000" dirty="0">
+                        <a:latin typeface="Calibri" charset="0"/>
+                        <a:ea typeface="Calibri" charset="0"/>
+                        <a:cs typeface="Calibri" charset="0"/>
+                      </a:endParaRPr>
+                    </a:p>
+                  </a:txBody>
+                  <a:tcPr marL="64008" marR="64008" marT="64008" marB="64008" anchor="ctr">
+                    <a:lnL w="9525" cap="flat" cmpd="sng" algn="ctr">
+                      <a:solidFill>
+                        <a:srgbClr val="C9D1D8"/>
+                      </a:solidFill>
+                      <a:prstDash val="solid"/>
+                      <a:round/>
+                      <a:headEnd type="none" w="med" len="med"/>
+                      <a:tailEnd type="none" w="med" len="med"/>
+                    </a:lnL>
+                    <a:lnR w="9525" cap="flat" cmpd="sng" algn="ctr">
+                      <a:solidFill>
+                        <a:srgbClr val="C9D1D8"/>
+                      </a:solidFill>
+                      <a:prstDash val="solid"/>
+                      <a:round/>
+                      <a:headEnd type="none" w="med" len="med"/>
+                      <a:tailEnd type="none" w="med" len="med"/>
+                    </a:lnR>
+                    <a:lnT w="9525" cap="flat" cmpd="sng" algn="ctr">
+                      <a:solidFill>
+                        <a:srgbClr val="C9D1D8"/>
+                      </a:solidFill>
+                      <a:prstDash val="solid"/>
+                      <a:round/>
+                      <a:headEnd type="none" w="med" len="med"/>
+                      <a:tailEnd type="none" w="med" len="med"/>
+                    </a:lnT>
+                    <a:lnB w="9525" cap="flat" cmpd="sng" algn="ctr">
+                      <a:solidFill>
+                        <a:srgbClr val="C9D1D8"/>
+                      </a:solidFill>
+                      <a:prstDash val="solid"/>
+                      <a:round/>
+                      <a:headEnd type="none" w="med" len="med"/>
+                      <a:tailEnd type="none" w="med" len="med"/>
+                    </a:lnB>
+                    <a:solidFill>
+                      <a:srgbClr val="EEF2F5"/>
+                    </a:solidFill>
+                  </a:tcPr>
+                </a:tc>
+                <a:tc>
+                  <a:txBody>
+                    <a:bodyPr/>
+                    <a:lstStyle/>
+                    <a:p>
+                      <a:pPr algn="l" indent="0" marL="0">
+                        <a:buNone/>
+                      </a:pPr>
+                      <a:r>
+                        <a:rPr lang="en-US" sz="1000" dirty="0">
+                          <a:solidFill>
+                            <a:srgbClr val="22303C"/>
+                          </a:solidFill>
+                          <a:latin typeface="Calibri" pitchFamily="34" charset="0"/>
+                          <a:ea typeface="Calibri" pitchFamily="34" charset="-122"/>
+                          <a:cs typeface="Calibri" pitchFamily="34" charset="-120"/>
+                        </a:rPr>
+                        <a:t>provisional · fail (acceptance)</a:t>
+                      </a:r>
+                      <a:endParaRPr lang="en-US" sz="1000" dirty="0">
+                        <a:latin typeface="Calibri" charset="0"/>
+                        <a:ea typeface="Calibri" charset="0"/>
+                        <a:cs typeface="Calibri" charset="0"/>
+                      </a:endParaRPr>
+                    </a:p>
+                  </a:txBody>
+                  <a:tcPr marL="64008" marR="64008" marT="64008" marB="64008" anchor="ctr">
+                    <a:lnL w="9525" cap="flat" cmpd="sng" algn="ctr">
+                      <a:solidFill>
+                        <a:srgbClr val="C9D1D8"/>
+                      </a:solidFill>
+                      <a:prstDash val="solid"/>
+                      <a:round/>
+                      <a:headEnd type="none" w="med" len="med"/>
+                      <a:tailEnd type="none" w="med" len="med"/>
+                    </a:lnL>
+                    <a:lnR w="9525" cap="flat" cmpd="sng" algn="ctr">
+                      <a:solidFill>
+                        <a:srgbClr val="C9D1D8"/>
+                      </a:solidFill>
+                      <a:prstDash val="solid"/>
+                      <a:round/>
+                      <a:headEnd type="none" w="med" len="med"/>
+                      <a:tailEnd type="none" w="med" len="med"/>
+                    </a:lnR>
+                    <a:lnT w="9525" cap="flat" cmpd="sng" algn="ctr">
+                      <a:solidFill>
+                        <a:srgbClr val="C9D1D8"/>
+                      </a:solidFill>
+                      <a:prstDash val="solid"/>
+                      <a:round/>
+                      <a:headEnd type="none" w="med" len="med"/>
+                      <a:tailEnd type="none" w="med" len="med"/>
+                    </a:lnT>
+                    <a:lnB w="9525" cap="flat" cmpd="sng" algn="ctr">
+                      <a:solidFill>
+                        <a:srgbClr val="C9D1D8"/>
+                      </a:solidFill>
+                      <a:prstDash val="solid"/>
+                      <a:round/>
+                      <a:headEnd type="none" w="med" len="med"/>
+                      <a:tailEnd type="none" w="med" len="med"/>
+                    </a:lnB>
+                    <a:solidFill>
+                      <a:srgbClr val="EEF2F5"/>
+                    </a:solidFill>
+                  </a:tcPr>
+                </a:tc>
+                <a:tc>
+                  <a:txBody>
+                    <a:bodyPr/>
+                    <a:lstStyle/>
+                    <a:p>
+                      <a:pPr algn="l" indent="0" marL="0">
+                        <a:buNone/>
+                      </a:pPr>
+                      <a:r>
+                        <a:rPr lang="en-US" sz="1000" b="1" dirty="0">
+                          <a:solidFill>
+                            <a:srgbClr val="2E7D4F"/>
+                          </a:solidFill>
+                          <a:latin typeface="Calibri" pitchFamily="34" charset="0"/>
+                          <a:ea typeface="Calibri" pitchFamily="34" charset="-122"/>
+                          <a:cs typeface="Calibri" pitchFamily="34" charset="-120"/>
+                        </a:rPr>
+                        <a:t>trusted · fail (acceptance)</a:t>
+                      </a:r>
+                      <a:endParaRPr lang="en-US" sz="1000" dirty="0">
+                        <a:latin typeface="Calibri" charset="0"/>
+                        <a:ea typeface="Calibri" charset="0"/>
+                        <a:cs typeface="Calibri" charset="0"/>
+                      </a:endParaRPr>
+                    </a:p>
+                  </a:txBody>
+                  <a:tcPr marL="64008" marR="64008" marT="64008" marB="64008" anchor="ctr">
+                    <a:lnL w="9525" cap="flat" cmpd="sng" algn="ctr">
+                      <a:solidFill>
+                        <a:srgbClr val="C9D1D8"/>
+                      </a:solidFill>
+                      <a:prstDash val="solid"/>
+                      <a:round/>
+                      <a:headEnd type="none" w="med" len="med"/>
+                      <a:tailEnd type="none" w="med" len="med"/>
+                    </a:lnL>
+                    <a:lnR w="9525" cap="flat" cmpd="sng" algn="ctr">
+                      <a:solidFill>
+                        <a:srgbClr val="C9D1D8"/>
+                      </a:solidFill>
+                      <a:prstDash val="solid"/>
+                      <a:round/>
+                      <a:headEnd type="none" w="med" len="med"/>
+                      <a:tailEnd type="none" w="med" len="med"/>
+                    </a:lnR>
+                    <a:lnT w="9525" cap="flat" cmpd="sng" algn="ctr">
+                      <a:solidFill>
+                        <a:srgbClr val="C9D1D8"/>
+                      </a:solidFill>
+                      <a:prstDash val="solid"/>
+                      <a:round/>
+                      <a:headEnd type="none" w="med" len="med"/>
+                      <a:tailEnd type="none" w="med" len="med"/>
+                    </a:lnT>
+                    <a:lnB w="9525" cap="flat" cmpd="sng" algn="ctr">
+                      <a:solidFill>
+                        <a:srgbClr val="C9D1D8"/>
+                      </a:solidFill>
+                      <a:prstDash val="solid"/>
+                      <a:round/>
+                      <a:headEnd type="none" w="med" len="med"/>
+                      <a:tailEnd type="none" w="med" len="med"/>
+                    </a:lnB>
+                    <a:solidFill>
+                      <a:srgbClr val="EEF2F5"/>
+                    </a:solidFill>
+                  </a:tcPr>
+                </a:tc>
+              </a:tr>
+            </a:tbl>
+          </a:graphicData>
+        </a:graphic>
+      </p:graphicFrame>
+      <p:sp>
+        <p:nvSpPr>
+          <p:cNvPr id="68" name="Text 65"/>
+          <p:cNvSpPr txBox="1"/>
+          <p:nvPr/>
+        </p:nvSpPr>
+        <p:spPr>
+          <a:xfrm>
+            <a:off x="457200" y="5925312"/>
+            <a:ext cx="8229600" cy="512064"/>
           </a:xfrm>
           <a:prstGeom prst="rect">
             <a:avLst/>
@@ -10674,15 +12004,68 @@
               <a:buNone/>
             </a:pPr>
             <a:r>
-              <a:rPr lang="en-US" sz="1000" i="1" dirty="0">
-                <a:solidFill>
-                  <a:srgbClr val="5E6B75"/>
+              <a:rPr lang="en-US" sz="950" b="1" dirty="0">
+                <a:solidFill>
+                  <a:srgbClr val="22303C"/>
                 </a:solidFill>
                 <a:latin typeface="Calibri" pitchFamily="34" charset="0"/>
                 <a:ea typeface="Calibri" pitchFamily="34" charset="-122"/>
                 <a:cs typeface="Calibri" pitchFamily="34" charset="-120"/>
               </a:rPr>
-              <a:t>Durations transcribed from plans/first-real-run.md — the raw logs live under $WORK_DIR/impress_a_runs on Delta. Bars are tool time; campaign wall clock is slightly longer.</a:t>
+              <a:t>22702568 ran 30/30 tasks clean and promoted nothing</a:t>
+            </a:r>
+            <a:pPr indent="0" marL="0">
+              <a:buNone/>
+            </a:pPr>
+            <a:r>
+              <a:rPr lang="en-US" sz="950" dirty="0">
+                <a:solidFill>
+                  <a:srgbClr val="22303C"/>
+                </a:solidFill>
+                <a:latin typeface="Calibri" pitchFamily="34" charset="0"/>
+                <a:ea typeface="Calibri" pitchFamily="34" charset="-122"/>
+                <a:cs typeface="Calibri" pitchFamily="34" charset="-120"/>
+              </a:rPr>
+              <a:t> — the all-gates rule made promotion a function of target difficulty (decision 0013). Two defects, both fixed: packmin's total_score &lt;= 1000 bound was ONE observation wide and demoted r0004 over a +1064.5 pose fastrelax took to -336, and the driver counted a Backtrack as a cycle, so every job asked for 6 runs and ran 5.</a:t>
+            </a:r>
+            <a:endParaRPr lang="en-US" sz="950" dirty="0"/>
+          </a:p>
+        </p:txBody>
+      </p:sp>
+      <p:sp>
+        <p:nvSpPr>
+          <p:cNvPr id="69" name="Text 66"/>
+          <p:cNvSpPr txBox="1"/>
+          <p:nvPr/>
+        </p:nvSpPr>
+        <p:spPr>
+          <a:xfrm>
+            <a:off x="457200" y="6492240"/>
+            <a:ext cx="11277295" cy="228600"/>
+          </a:xfrm>
+          <a:prstGeom prst="rect">
+            <a:avLst/>
+          </a:prstGeom>
+          <a:noFill/>
+          <a:ln/>
+        </p:spPr>
+        <p:txBody>
+          <a:bodyPr wrap="square" lIns="0" tIns="0" rIns="0" bIns="0" rtlCol="0" anchor="t"/>
+          <a:lstStyle/>
+          <a:p>
+            <a:pPr indent="0" marL="0">
+              <a:buNone/>
+            </a:pPr>
+            <a:r>
+              <a:rPr lang="en-US" sz="1000" i="1" dirty="0">
+                <a:solidFill>
+                  <a:srgbClr val="5E6B75"/>
+                </a:solidFill>
+                <a:latin typeface="Calibri" pitchFamily="34" charset="0"/>
+                <a:ea typeface="Calibri" pitchFamily="34" charset="-122"/>
+                <a:cs typeface="Calibri" pitchFamily="34" charset="-120"/>
+              </a:rPr>
+              <a:t>Durations transcribed from plans/first-real-run.md; the trust runs from plans/next-run-promotion.md and plans/next-run-sustained-trust.md — the raw logs live under $WORK_DIR/impress_a_runs on Delta. Bars are tool time.</a:t>
             </a:r>
             <a:endParaRPr lang="en-US" sz="1000" dirty="0"/>
           </a:p>
@@ -11586,8 +12969,8 @@
         </p:nvSpPr>
         <p:spPr>
           <a:xfrm>
-            <a:off x="457200" y="5833872"/>
-            <a:ext cx="11274552" cy="566928"/>
+            <a:off x="457200" y="5797296"/>
+            <a:ext cx="11274552" cy="694944"/>
           </a:xfrm>
           <a:prstGeom prst="rect">
             <a:avLst/>
@@ -11611,8 +12994,8 @@
         </p:nvSpPr>
         <p:spPr>
           <a:xfrm>
-            <a:off x="640080" y="5897880"/>
-            <a:ext cx="10927080" cy="457200"/>
+            <a:off x="640080" y="5870448"/>
+            <a:ext cx="10927080" cy="566928"/>
           </a:xfrm>
           <a:prstGeom prst="rect">
             <a:avLst/>
@@ -12040,11 +13423,11 @@
             <a:avLst/>
           </a:prstGeom>
           <a:solidFill>
-            <a:srgbClr val="F9E0DD"/>
+            <a:srgbClr val="E4F1EA"/>
           </a:solidFill>
           <a:ln w="12700">
             <a:solidFill>
-              <a:srgbClr val="F9E0DD"/>
+              <a:srgbClr val="E4F1EA"/>
             </a:solidFill>
             <a:prstDash val="solid"/>
           </a:ln>
@@ -12077,13 +13460,13 @@
             <a:r>
               <a:rPr lang="en-US" sz="1300" b="1" dirty="0">
                 <a:solidFill>
-                  <a:srgbClr val="C0392B"/>
+                  <a:srgbClr val="2E7D5B"/>
                 </a:solidFill>
                 <a:latin typeface="Calibri" pitchFamily="34" charset="0"/>
                 <a:ea typeface="Calibri" pitchFamily="34" charset="-122"/>
                 <a:cs typeface="Calibri" pitchFamily="34" charset="-120"/>
               </a:rPr>
-              <a:t>promote_after = 3 counts within ONE file</a:t>
+              <a:t>…and then it remembered</a:t>
             </a:r>
             <a:endParaRPr lang="en-US" sz="1300" dirty="0"/>
           </a:p>
@@ -12118,7 +13501,7 @@
               <a:buChar char="•"/>
             </a:pPr>
             <a:r>
-              <a:rPr lang="en-US" sz="1050" dirty="0">
+              <a:rPr lang="en-US" sz="950" dirty="0">
                 <a:solidFill>
                   <a:srgbClr val="22303C"/>
                 </a:solidFill>
@@ -12126,9 +13509,30 @@
                 <a:ea typeface="Calibri" pitchFamily="34" charset="-122"/>
                 <a:cs typeface="Calibri" pitchFamily="34" charset="-120"/>
               </a:rPr>
-              <a:t>Two more jobs would have produced three files holding one run each, a pattern still untrusted, and two allocations spent for nothing.</a:t>
-            </a:r>
-            <a:endParaRPr lang="en-US" sz="1050" dirty="0"/>
+              <a:t>trust_root is absolute now, so evidence accumulates ACROSS jobs: 22702568's last event was clean, so 22726105 promoted a run early.</a:t>
+            </a:r>
+            <a:endParaRPr lang="en-US" sz="950" dirty="0"/>
+          </a:p>
+          <a:p>
+            <a:pPr marL="342900" indent="-342900">
+              <a:spcAft>
+                <a:spcPts val="400"/>
+              </a:spcAft>
+              <a:buSzPct val="100000"/>
+              <a:buChar char="•"/>
+            </a:pPr>
+            <a:r>
+              <a:rPr lang="en-US" sz="950" dirty="0">
+                <a:solidFill>
+                  <a:srgbClr val="22303C"/>
+                </a:solidFill>
+                <a:latin typeface="Calibri" pitchFamily="34" charset="0"/>
+                <a:ea typeface="Calibri" pitchFamily="34" charset="-122"/>
+                <a:cs typeface="Calibri" pitchFamily="34" charset="-120"/>
+              </a:rPr>
+              <a:t>22728140 then ran 3 consecutive trusted cycles — 0 demotions, 0 integrity failures.</a:t>
+            </a:r>
+            <a:endParaRPr lang="en-US" sz="950" dirty="0"/>
           </a:p>
         </p:txBody>
       </p:sp>
@@ -12187,13 +13591,13 @@
             <a:r>
               <a:rPr lang="en-US" sz="1150" b="1" dirty="0">
                 <a:solidFill>
-                  <a:srgbClr val="C0392B"/>
+                  <a:srgbClr val="2E7D5B"/>
                 </a:solidFill>
                 <a:latin typeface="Calibri" pitchFamily="34" charset="0"/>
                 <a:ea typeface="Calibri" pitchFamily="34" charset="-122"/>
                 <a:cs typeface="Calibri" pitchFamily="34" charset="-120"/>
               </a:rPr>
-              <a:t>the trusted code path has never executed</a:t>
+              <a:t>the trusted path did not execute until job 22726105</a:t>
             </a:r>
             <a:pPr indent="0" marL="0">
               <a:buNone/>
@@ -12207,7 +13611,7 @@
                 <a:ea typeface="Calibri" pitchFamily="34" charset="-122"/>
                 <a:cs typeface="Calibri" pitchFamily="34" charset="-120"/>
               </a:rPr>
-              <a:t>: no pattern has ever skipped the forced dry-run, and the 10% cap has applied to every graph ever composed on real hardware.</a:t>
+              <a:t>: every graph composed on real hardware before it ran under the forced dry-run and the 10% cap — and that cap is what truncated boltz_predict off the chain twice.</a:t>
             </a:r>
             <a:endParaRPr lang="en-US" sz="1150" dirty="0"/>
           </a:p>
@@ -14036,7 +15440,7 @@
                 <a:ea typeface="Consolas" pitchFamily="34" charset="-122"/>
                 <a:cs typeface="Consolas" pitchFamily="34" charset="-120"/>
               </a:rPr>
-              <a:t>pytest tests -q                    # 162 tests, no allocation</a:t>
+              <a:t>pytest tests -q                    # 165 tests, no allocation</a:t>
             </a:r>
             <a:endParaRPr lang="en-US" sz="1000" dirty="0"/>
           </a:p>
@@ -16276,7 +17680,7 @@
                 <a:ea typeface="Calibri" pitchFamily="34" charset="-122"/>
                 <a:cs typeface="Calibri" pitchFamily="34" charset="-120"/>
               </a:rPr>
-              <a:t>The engine — compose, five gates, interlock, Pareto tree, provenance, durable run ledger.</a:t>
+              <a:t>The TRUSTED path: promoted after r0002, then 3 consecutive trusted cycles — no forced dry-run, no cost cap, no demotion, no integrity failure.</a:t>
             </a:r>
             <a:endParaRPr lang="en-US" sz="1000" dirty="0"/>
           </a:p>
@@ -16340,7 +17744,7 @@
                 <a:ea typeface="Calibri" pitchFamily="34" charset="-122"/>
                 <a:cs typeface="Calibri" pitchFamily="34" charset="-120"/>
               </a:rPr>
-              <a:t>Four control models, plus conduct() reasoners, over one shared executor.</a:t>
+              <a:t>The engine — compose, five gates, interlock, Pareto tree, provenance, durable run ledger.</a:t>
             </a:r>
             <a:endParaRPr lang="en-US" sz="1000" dirty="0"/>
           </a:p>
@@ -16404,7 +17808,7 @@
                 <a:ea typeface="Calibri" pitchFamily="34" charset="-122"/>
                 <a:cs typeface="Calibri" pitchFamily="34" charset="-120"/>
               </a:rPr>
-              <a:t>Control plane: in-process and HTTP+SSE, with synchronous admission, covered end to end.</a:t>
+              <a:t>Four control models, plus conduct() reasoners, over one shared executor.</a:t>
             </a:r>
             <a:endParaRPr lang="en-US" sz="1000" dirty="0"/>
           </a:p>
@@ -16468,7 +17872,7 @@
                 <a:ea typeface="Calibri" pitchFamily="34" charset="-122"/>
                 <a:cs typeface="Calibri" pitchFamily="34" charset="-120"/>
               </a:rPr>
-              <a:t>A reasoner in another process, driving a campaign over the HTTP plane.</a:t>
+              <a:t>Control plane in two transports, in-process and HTTP+SSE, with synchronous admission — including a reasoner in another process driving a campaign over it.</a:t>
             </a:r>
             <a:endParaRPr lang="en-US" sz="1000" dirty="0"/>
           </a:p>
@@ -16724,7 +18128,7 @@
                 <a:ea typeface="Calibri" pitchFamily="34" charset="-122"/>
                 <a:cs typeface="Calibri" pitchFamily="34" charset="-120"/>
               </a:rPr>
-              <a:t>Nothing has ever been promoted by the trust ledger, so the trusted path has never run.</a:t>
+              <a:t>No node has ever reached plain pass. All 5 trusted nodes missed an acceptance threshold, at a 31% acceptance rate over 16 complete runs — that wants more draws, not code.</a:t>
             </a:r>
             <a:endParaRPr lang="en-US" sz="1000" dirty="0"/>
           </a:p>
@@ -17083,7 +18487,7 @@
                 <a:ea typeface="Calibri" pitchFamily="34" charset="-122"/>
                 <a:cs typeface="Calibri" pitchFamily="34" charset="-120"/>
               </a:rPr>
-              <a:t>One campaign has completed. </a:t>
+              <a:t>16 complete six-stage runs, and the trusted path held. </a:t>
             </a:r>
             <a:pPr indent="0" marL="0">
               <a:buNone/>
@@ -17097,7 +18501,7 @@
                 <a:ea typeface="Calibri" pitchFamily="34" charset="-122"/>
                 <a:cs typeface="Calibri" pitchFamily="34" charset="-120"/>
               </a:rPr>
-              <a:t>One lineage, one cycle, one draw — and the node it produced is marked suspect, which is the interlock working rather than a defect.</a:t>
+              <a:t>Every one of them was a single lineage, so breadth is still unexercised — and no node has yet cleared every gate while trusted.</a:t>
             </a:r>
             <a:endParaRPr lang="en-US" sz="1250" dirty="0"/>
           </a:p>
@@ -22646,7 +24050,7 @@
                 <a:ea typeface="Calibri" pitchFamily="34" charset="-122"/>
                 <a:cs typeface="Calibri" pitchFamily="34" charset="-120"/>
               </a:rPr>
-              <a:t>And what one completed campaign is not</a:t>
+              <a:t>And what the real path still is not</a:t>
             </a:r>
             <a:endParaRPr lang="en-US" sz="1300" dirty="0"/>
           </a:p>
@@ -22689,7 +24093,7 @@
                 <a:ea typeface="Calibri" pitchFamily="34" charset="-122"/>
                 <a:cs typeface="Calibri" pitchFamily="34" charset="-120"/>
               </a:rPr>
-              <a:t>One lineage, one cycle, one draw. replicas &gt; 1 has never executed, so the independence invariant is unexercised.</a:t>
+              <a:t>Every run so far is ONE lineage. replicas &gt; 1 has never executed, so the independence invariant is unexercised.</a:t>
             </a:r>
             <a:endParaRPr lang="en-US" sz="1100" dirty="0"/>
           </a:p>
@@ -22710,7 +24114,7 @@
                 <a:ea typeface="Calibri" pitchFamily="34" charset="-122"/>
                 <a:cs typeface="Calibri" pitchFamily="34" charset="-120"/>
               </a:rPr>
-              <a:t>The node is suspect, not pass — the composition pattern is provisional. Nothing has ever been promoted on Delta, so the trusted path has never run.</a:t>
+              <a:t>No node has reached plain pass. This one is suspect because its pattern was still provisional; all 5 trusted nodes since missed an acceptance threshold instead.</a:t>
             </a:r>
             <a:endParaRPr lang="en-US" sz="1100" dirty="0"/>
           </a:p>
@@ -25224,7 +26628,7 @@
                 <a:ea typeface="Consolas" pitchFamily="34" charset="-122"/>
                 <a:cs typeface="Consolas" pitchFamily="34" charset="-120"/>
               </a:rPr>
-              <a:t>_submit_with_retry:84</a:t>
+              <a:t>_submit_with_retry:98</a:t>
             </a:r>
             <a:endParaRPr lang="en-US" sz="1400" dirty="0"/>
           </a:p>

--- a/agent/slides/impress-a-codewalk.pptx
+++ b/agent/slides/impress-a-codewalk.pptx
@@ -1169,7 +1169,7 @@
 Top left: their search improves and then stops. Median pLDDT by episode tercile goes ninety point seven, ninety-five point two, ninety-five point oh — plus four and a half, then minus nought point two. Depth buys you something and then it buys you nothing, and they have the sample size to say so where we do not.
 Bottom left is the pair worth staring at. Their eight hundred and four passing folds are five hundred and ninety-six clusters — seventy-four percent independent. Our seventeen designs cluster into five structural groups: twenty-nine percent. We are the worse number. Both analyses overcount their own yield, and both point at the same lever: width, not depth.
 Right side is what this project does about it, and the dotted borders are doing the work. Replicas-N means N independent lineages, one node each, and the executor never funnels them back into one candidate. The front is deliberately not monotonic, so a node promoted on an optimistic prediction gets demoted by its own assay. Trust is scored on shape, so breadth has an identity of its own.
-All of it dotted — written, typed, unit-tested, never executed. And the cheap route is closed: the signature includes replica multiplicity, so trust earned at one lineage does not transfer to four. A four-lineage graph arrives untrusted, under a cap it already exceeds. That is ask five.</a:t>
+All of it dotted — written, typed, unit-tested, and never executed on real tools; the only lineages that have run are mock ones. And the cheap route is closed: the signature includes replica multiplicity, so trust earned at one lineage does not transfer to four. A four-lineage graph arrives untrusted, under a cap it already exceeds. That is ask five.</a:t>
             </a:r>
             <a:endParaRPr lang="en-US" dirty="0"/>
           </a:p>
@@ -1805,7 +1805,7 @@
             <a:r>
               <a:rPr lang="en-US" dirty="0"/>
               <a:t>[1:30] I will not compress this slide, because an audience that catches you overclaiming stops believing everything else. Three columns, three green rows and three red rows each, and the equal lengths are the argument.
-Functionality: a real six-stage campaign end to end, the whole engine, four control models over one executor, and adding a tool has never touched the composer. Against that — replicas greater than one has never run; no measurement has superseded a prediction, which is exactly the capability a composed graph has and a written-down one does not; and six of the eight compute patterns have no member, including the one reserved for running their pipeline as one of ours.
+Functionality: a real six-stage campaign end to end, the whole engine, four control models over one executor, and adding a tool has never touched the composer. Against that — replicas greater than one has never run on real tools; no measurement has superseded a prediction, which is exactly the capability a composed graph has and a written-down one does not; and six of the eight compute patterns have no member, including the one reserved for running their pipeline as one of ours.
 Performance: the trusted path promoted after the second run and held three cycles with no safety net; the scrutiny is measured and free; both ends of the Dragon lifecycle bounded against real lost allocations. Against that — no serial baseline; one GPU of four ever works; and no node has reached a plain pass, which wants more draws rather than more code.
 Usability: one YAML and one command, the local tier with no allocation, runtime-discovered toolkits, a reasoner in another process. Against that — no resume, no serve or reason command so the headless model lies about which model it is, and the site files are read by nothing.
 Sixteen complete runs, the trusted path held, and every one of them one lineage on a system built for width.</a:t>
@@ -2265,7 +2265,7 @@
               <a:rPr lang="en-US" dirty="0"/>
               <a:t>[1:35] What this is compared against. Not a blank page.
 The reference IMPRESS pipeline does adaptive protein design at a scale we have not touched — twenty-four thousand task directories, nine hundred passing folds, no task failures on the clean runs. It also solved the thing we have not: eight pipelines per GPU takes utilisation from twelve percent to seventy and cuts cost per fold threefold. And its orchestration is not the overhead, at under two percent of the manager's wall clock.
-So the question is not whether an adaptive pipeline works. It does. The question is what it costs to change one — the middle band, mined from their checkout rather than quoted. The shape of the graph is nineteen assignments to next_step inside one decision function; the thresholds are a dataclass in the runner; the QC verdict is computed inside the coroutine that parses the output; the hook is a plain closure with full object access and no schema. One use case is fourteen hundred lines plus a runner — and the non-adaptive version of the same science is a hundred-line routing table, which is what a declarative rewrite actually looks like.
+So the question is not whether an adaptive pipeline works. It does. The question is what it costs to change one — the middle band, mined from their own code rather than quoted. The shape of the graph is nineteen assignments to next_step inside one decision function; the thresholds are a dataclass in the runner; the QC verdict is computed inside the coroutine that parses the output; the hook is a plain closure with full object access and no schema. One use case is fourteen hundred lines plus a runner — and the non-adaptive version of the same science is a hundred-line routing table, which is what a declarative rewrite actually looks like.
 The bottom cards are why I think composition is worth the trouble, and they are their numbers. Their guided feedback, against its own parent fold, is flat — plus nought point nought one one pLDDT, p of nought point eight five. A cheap re-sampler, not a ratchet — and still worth having at four times cheaper per fold. And eight hundred passing folds are five hundred and ninety-six clusters: width buys independent searches, depth refines one.
 The last line is owed rather than implied — that pipeline paid for lessons we inherited for free, including the storage fix in act two.</a:t>
             </a:r>
@@ -4098,7 +4098,7 @@
                 <a:ea typeface="Calibri" pitchFamily="34" charset="-122"/>
                 <a:cs typeface="Calibri" pitchFamily="34" charset="-120"/>
               </a:rPr>
-              <a:t>Lab code walk, in three acts · main @ ffac4b0 · 6.6k lines of source, 165 tests, 11 tools in 5 toolkits</a:t>
+              <a:t>Lab code walk, in three acts · agent/ · merge-impress-a @ c163fe2 · 6.6k lines of source, 168 tests, 11 tools in 5 toolkits</a:t>
             </a:r>
             <a:endParaRPr lang="en-US" sz="1200" dirty="0"/>
           </a:p>
@@ -6198,7 +6198,7 @@
                 <a:ea typeface="Consolas" pitchFamily="34" charset="-122"/>
                 <a:cs typeface="Consolas" pitchFamily="34" charset="-120"/>
               </a:rPr>
-              <a:t>tools/mock_agents.py:73–84  ·  EDITED</a:t>
+              <a:t>tools/mock_agents.py:84–95  ·  EDITED</a:t>
             </a:r>
             <a:endParaRPr lang="en-US" sz="850" dirty="0"/>
           </a:p>
@@ -6364,7 +6364,7 @@
                 <a:ea typeface="Consolas" pitchFamily="34" charset="-122"/>
                 <a:cs typeface="Consolas" pitchFamily="34" charset="-120"/>
               </a:rPr>
-              <a:t>test_campaign.py:81–83  ·  EDITED (one string wrapped)</a:t>
+              <a:t>tests/test_campaign.py:96–98  ·  EDITED (wrapped, messages dropped)</a:t>
             </a:r>
             <a:endParaRPr lang="en-US" sz="850" dirty="0"/>
           </a:p>
@@ -16316,7 +16316,7 @@
                 <a:ea typeface="Calibri" pitchFamily="34" charset="-122"/>
                 <a:cs typeface="Calibri" pitchFamily="34" charset="-120"/>
               </a:rPr>
-              <a:t>the machinery for width is written, typed and unit-tested, and replicas &gt; 1 has never executed. Worse, the cheap route to it is closed: the pattern signature includes replica multiplicity, so the trust earned at one lineage does not transfer to four — a four-lineage graph starts untrusted, under a cap it already exceeds. That is backlog A10 and it is ask 5.</a:t>
+              <a:t>the machinery for width is written, typed and unit-tested, and replicas &gt; 1 has run against mocks only, never on the real chain. Worse, the cheap route to it is closed: the pattern signature includes replica multiplicity, so the trust earned at one lineage does not transfer to four — a four-lineage graph starts untrusted, under a cap it already exceeds. That is backlog A10 and it is ask 5.</a:t>
             </a:r>
             <a:endParaRPr lang="en-US" sz="1050" dirty="0"/>
           </a:p>
@@ -19756,7 +19756,7 @@
                 <a:ea typeface="Calibri" pitchFamily="34" charset="-122"/>
                 <a:cs typeface="Calibri" pitchFamily="34" charset="-120"/>
               </a:rPr>
-              <a:t>A campaign is one YAML and one command. The whole local tier - 165 tests over 3,791 lines - runs on a laptop with no scheduler, no GPU and no cluster.</a:t>
+              <a:t>A campaign is one YAML and one command. The whole local tier - 168 tests over 3,855 lines - runs on a laptop with no scheduler, no GPU and no cluster.</a:t>
             </a:r>
             <a:endParaRPr lang="en-US" sz="1200" dirty="0"/>
           </a:p>
@@ -21765,7 +21765,7 @@
                 <a:ea typeface="Consolas" pitchFamily="34" charset="-122"/>
                 <a:cs typeface="Consolas" pitchFamily="34" charset="-120"/>
               </a:rPr>
-              <a:t>pytest tests -q                    # 165 tests, no allocation</a:t>
+              <a:t>pytest tests -q                    # 168 tests, no allocation</a:t>
             </a:r>
             <a:endParaRPr lang="en-US" sz="1000" dirty="0"/>
           </a:p>
@@ -25068,7 +25068,7 @@
                 <a:ea typeface="Calibri" pitchFamily="34" charset="-122"/>
                 <a:cs typeface="Calibri" pitchFamily="34" charset="-120"/>
               </a:rPr>
-              <a:t>replicas &gt; 1 has NEVER executed. N independent lineages is the invariant most likely to be silently wrong.</a:t>
+              <a:t>replicas &gt; 1 has NEVER executed on real tools, only against mocks. N independent lineages is the invariant most likely to be silently wrong.</a:t>
             </a:r>
             <a:endParaRPr lang="en-US" sz="850" dirty="0"/>
           </a:p>
@@ -37804,7 +37804,7 @@
                         <a:buNone/>
                       </a:pPr>
                       <a:r>
-                        <a:rPr lang="en-US" sz="850" dirty="0">
+                        <a:rPr lang="en-US" sz="750" dirty="0">
                           <a:solidFill>
                             <a:srgbClr val="5E6B75"/>
                           </a:solidFill>
@@ -37814,7 +37814,7 @@
                         </a:rPr>
                         <a:t>run_small_molecule_binding.py:210</a:t>
                       </a:r>
-                      <a:endParaRPr lang="en-US" sz="850" dirty="0">
+                      <a:endParaRPr lang="en-US" sz="750" dirty="0">
                         <a:latin typeface="Consolas" charset="0"/>
                         <a:ea typeface="Consolas" charset="0"/>
                         <a:cs typeface="Consolas" charset="0"/>
@@ -38010,7 +38010,7 @@
                         <a:buNone/>
                       </a:pPr>
                       <a:r>
-                        <a:rPr lang="en-US" sz="850" dirty="0">
+                        <a:rPr lang="en-US" sz="750" dirty="0">
                           <a:solidFill>
                             <a:srgbClr val="5E6B75"/>
                           </a:solidFill>
@@ -38020,7 +38020,7 @@
                         </a:rPr>
                         <a:t>…:63</a:t>
                       </a:r>
-                      <a:endParaRPr lang="en-US" sz="850" dirty="0">
+                      <a:endParaRPr lang="en-US" sz="750" dirty="0">
                         <a:latin typeface="Consolas" charset="0"/>
                         <a:ea typeface="Consolas" charset="0"/>
                         <a:cs typeface="Consolas" charset="0"/>
@@ -38216,7 +38216,7 @@
                         <a:buNone/>
                       </a:pPr>
                       <a:r>
-                        <a:rPr lang="en-US" sz="850" dirty="0">
+                        <a:rPr lang="en-US" sz="750" dirty="0">
                           <a:solidFill>
                             <a:srgbClr val="5E6B75"/>
                           </a:solidFill>
@@ -38226,7 +38226,7 @@
                         </a:rPr>
                         <a:t>small_molecule_binding.py:1154</a:t>
                       </a:r>
-                      <a:endParaRPr lang="en-US" sz="850" dirty="0">
+                      <a:endParaRPr lang="en-US" sz="750" dirty="0">
                         <a:latin typeface="Consolas" charset="0"/>
                         <a:ea typeface="Consolas" charset="0"/>
                         <a:cs typeface="Consolas" charset="0"/>
@@ -38422,7 +38422,7 @@
                         <a:buNone/>
                       </a:pPr>
                       <a:r>
-                        <a:rPr lang="en-US" sz="850" dirty="0">
+                        <a:rPr lang="en-US" sz="750" dirty="0">
                           <a:solidFill>
                             <a:srgbClr val="5E6B75"/>
                           </a:solidFill>
@@ -38432,7 +38432,7 @@
                         </a:rPr>
                         <a:t>briefs/impress.md:112</a:t>
                       </a:r>
-                      <a:endParaRPr lang="en-US" sz="850" dirty="0">
+                      <a:endParaRPr lang="en-US" sz="750" dirty="0">
                         <a:latin typeface="Consolas" charset="0"/>
                         <a:ea typeface="Consolas" charset="0"/>
                         <a:cs typeface="Consolas" charset="0"/>
@@ -38786,7 +38786,7 @@
                 <a:ea typeface="Calibri" pitchFamily="34" charset="-122"/>
                 <a:cs typeface="Calibri" pitchFamily="34" charset="-120"/>
               </a:rPr>
-              <a:t>source: IMPRESS small-molecule performance report (impress-smallmol-performance/report.md), over impress_runs_export_nvme_2026-10-08.tar.gz; structural counts mined from that checkout at 5f12c1a.</a:t>
+              <a:t>source: IMPRESS small-molecule performance report (impress-smallmol-performance/report.md), over impress_runs_export_nvme_2026-10-08.tar.gz; structural counts mined from examples/small_molecule_binding in this repo at c163fe2.</a:t>
             </a:r>
             <a:endParaRPr lang="en-US" sz="1000" dirty="0"/>
           </a:p>
@@ -40118,7 +40118,7 @@
                 <a:ea typeface="Calibri" pitchFamily="34" charset="-122"/>
                 <a:cs typeface="Calibri" pitchFamily="34" charset="-120"/>
               </a:rPr>
-              <a:t>one YAML, one command, 165 tests with no allocation</a:t>
+              <a:t>one YAML, one command, 168 tests with no allocation</a:t>
             </a:r>
             <a:endParaRPr lang="en-US" sz="950" dirty="0"/>
           </a:p>
@@ -40402,7 +40402,7 @@
                 <a:ea typeface="Calibri" pitchFamily="34" charset="-122"/>
                 <a:cs typeface="Calibri" pitchFamily="34" charset="-120"/>
               </a:rPr>
-              <a:t>Every figure in it comes from one lineage on one GPU: 16 complete six-stage runs, all of them serial. replicas &gt; 1 has never executed, so the invariant that N lineages must produce N independent nodes is unexercised — and it is the one most likely to be silently wrong. There is no head-to-head against the reference pipeline and I am not going to construct one.</a:t>
+              <a:t>Every figure in it comes from one lineage on one GPU: 16 complete six-stage runs, all of them serial. On real tools replicas &gt; 1 has never executed — only against mocks — so the invariant that N lineages must produce N independent nodes is unexercised, and it is the one most likely to be silently wrong. There is no head-to-head against the reference pipeline and I am not going to construct one.</a:t>
             </a:r>
             <a:endParaRPr lang="en-US" sz="1250" dirty="0"/>
           </a:p>

--- a/agent/slides/impress-a-codewalk.pptx
+++ b/agent/slides/impress-a-codewalk.pptx
@@ -1169,7 +1169,8 @@
 Top left: their search improves and then stops. Median pLDDT by episode tercile goes ninety point seven, ninety-five point two, ninety-five point oh — plus four and a half, then minus nought point two. Depth buys you something and then it buys you nothing, and they have the sample size to say so where we do not.
 Bottom left is the pair worth staring at. Their eight hundred and four passing folds are five hundred and ninety-six clusters — seventy-four percent independent. Our seventeen designs cluster into five structural groups: twenty-nine percent. We are the worse number. Both analyses overcount their own yield, and both point at the same lever: width, not depth.
 Right side is what this project does about it, and the dotted borders are doing the work. Replicas-N means N independent lineages, one node each, and the executor never funnels them back into one candidate. The front is deliberately not monotonic, so a node promoted on an optimistic prediction gets demoted by its own assay. Trust is scored on shape, so breadth has an identity of its own.
-All of it dotted — written, typed, unit-tested, and never executed on real tools; the only lineages that have run are mock ones. And the cheap route is closed: the signature includes replica multiplicity, so trust earned at one lineage does not transfer to four. A four-lineage graph arrives untrusted, under a cap it already exceeds. That is ask five.</a:t>
+All of it dotted — written, typed, unit-tested, and never executed on real tools; the only lineages that have run are mock ones. And the cheap route is closed: the signature includes replica multiplicity, so trust earned at one lineage does not transfer to four. A four-lineage graph arrives untrusted, under a cap it already exceeds. That is ask five.
+And the second half of that box is newer than the rest of this deck. The same archive, re-derived at five packing rungs with one policy held fixed: packing alone is worth five and a half times on backbones per node-hour, against about three times for the best decision layer anybody has run. Nobody has had both. We run one lineage on one of four GPUs — the cheap lever, un-pulled.</a:t>
             </a:r>
             <a:endParaRPr lang="en-US" dirty="0"/>
           </a:p>
@@ -2267,7 +2268,7 @@
 The reference IMPRESS pipeline does adaptive protein design at a scale we have not touched — twenty-four thousand task directories, nine hundred passing folds, no task failures on the clean runs. It also solved the thing we have not: eight pipelines per GPU takes utilisation from twelve percent to seventy and cuts cost per fold threefold. And its orchestration is not the overhead, at under two percent of the manager's wall clock.
 So the question is not whether an adaptive pipeline works. It does. The question is what it costs to change one — the middle band, mined from their own code rather than quoted. The shape of the graph is nineteen assignments to next_step inside one decision function; the thresholds are a dataclass in the runner; the QC verdict is computed inside the coroutine that parses the output; the hook is a plain closure with full object access and no schema. One use case is fourteen hundred lines plus a runner — and the non-adaptive version of the same science is a hundred-line routing table, which is what a declarative rewrite actually looks like.
 The bottom cards are why I think composition is worth the trouble, and they are their numbers. Their guided feedback, against its own parent fold, is flat — plus nought point nought one one pLDDT, p of nought point eight five. A cheap re-sampler, not a ratchet — and still worth having at four times cheaper per fold. And eight hundred passing folds are five hundred and ninety-six clusters: width buys independent searches, depth refines one.
-The last line is owed rather than implied — that pipeline paid for lessons we inherited for free, including the storage fix in act two.</a:t>
+The last line is owed rather than implied — that pipeline paid for lessons we inherited for free, including the storage fix in act two. And the half of it in their colour is owed too: these are their best figures, not their current ones. With the same decision function their own fastrelax rate fell sixty-four to forty-nine percent by October twenty-second, and binder length explains one point of fourteen. I am crediting the healthy period on purpose, and I am not using the rest against them.</a:t>
             </a:r>
             <a:endParaRPr lang="en-US" dirty="0"/>
           </a:p>
@@ -4098,7 +4099,7 @@
                 <a:ea typeface="Calibri" pitchFamily="34" charset="-122"/>
                 <a:cs typeface="Calibri" pitchFamily="34" charset="-120"/>
               </a:rPr>
-              <a:t>Lab code walk, in three acts · agent/ · merge-impress-a @ c163fe2 · 6.6k lines of source, 168 tests, 11 tools in 5 toolkits</a:t>
+              <a:t>Lab code walk, in three acts · agent/ · slides/impress-a-api-user-slides @ bf32d1d · 6.6k lines of source, 168 tests, 11 tools in 5 toolkits</a:t>
             </a:r>
             <a:endParaRPr lang="en-US" sz="1200" dirty="0"/>
           </a:p>
@@ -16252,8 +16253,8 @@
         </p:nvSpPr>
         <p:spPr>
           <a:xfrm>
-            <a:off x="457200" y="4974336"/>
-            <a:ext cx="5486400" cy="1188720"/>
+            <a:off x="457200" y="4791456"/>
+            <a:ext cx="5486400" cy="1536192"/>
           </a:xfrm>
           <a:prstGeom prst="rect">
             <a:avLst/>
@@ -16277,8 +16278,8 @@
         </p:nvSpPr>
         <p:spPr>
           <a:xfrm>
-            <a:off x="621792" y="5047488"/>
-            <a:ext cx="5175504" cy="1060704"/>
+            <a:off x="621792" y="4855464"/>
+            <a:ext cx="5175504" cy="1408176"/>
           </a:xfrm>
           <a:prstGeom prst="rect">
             <a:avLst/>
@@ -16294,7 +16295,7 @@
               <a:buNone/>
             </a:pPr>
             <a:r>
-              <a:rPr lang="en-US" sz="1050" b="1" dirty="0">
+              <a:rPr lang="en-US" sz="860" b="1" dirty="0">
                 <a:solidFill>
                   <a:srgbClr val="F09A8C"/>
                 </a:solidFill>
@@ -16308,7 +16309,7 @@
               <a:buNone/>
             </a:pPr>
             <a:r>
-              <a:rPr lang="en-US" sz="1050" dirty="0">
+              <a:rPr lang="en-US" sz="860" dirty="0">
                 <a:solidFill>
                   <a:srgbClr val="DCE5EC"/>
                 </a:solidFill>
@@ -16316,48 +16317,66 @@
                 <a:ea typeface="Calibri" pitchFamily="34" charset="-122"/>
                 <a:cs typeface="Calibri" pitchFamily="34" charset="-120"/>
               </a:rPr>
-              <a:t>the machinery for width is written, typed and unit-tested, and replicas &gt; 1 has run against mocks only, never on the real chain. Worse, the cheap route to it is closed: the pattern signature includes replica multiplicity, so the trust earned at one lineage does not transfer to four — a four-lineage graph starts untrusted, under a cap it already exceeds. That is backlog A10 and it is ask 5.</a:t>
-            </a:r>
-            <a:endParaRPr lang="en-US" sz="1050" dirty="0"/>
-          </a:p>
-        </p:txBody>
-      </p:sp>
-      <p:sp>
-        <p:nvSpPr>
-          <p:cNvPr id="47" name="Text 45"/>
-          <p:cNvSpPr txBox="1"/>
-          <p:nvPr/>
-        </p:nvSpPr>
-        <p:spPr>
-          <a:xfrm>
-            <a:off x="457200" y="6492240"/>
-            <a:ext cx="11277295" cy="228600"/>
-          </a:xfrm>
-          <a:prstGeom prst="rect">
-            <a:avLst/>
-          </a:prstGeom>
-          <a:noFill/>
-          <a:ln/>
-        </p:spPr>
-        <p:txBody>
-          <a:bodyPr wrap="square" lIns="0" tIns="0" rIns="0" bIns="0" rtlCol="0" anchor="t"/>
-          <a:lstStyle/>
+              <a:t>the machinery for width is written, typed and unit-tested, and replicas &gt; 1 has run against mocks only, never on the real chain. Worse, the cheap route is closed: the pattern signature includes replica multiplicity, so trust earned at one lineage does not transfer to four — a four-lineage graph starts untrusted, under a cap it already exceeds. Backlog A10, ask 5.
+</a:t>
+            </a:r>
+            <a:endParaRPr lang="en-US" sz="860" dirty="0"/>
+          </a:p>
           <a:p>
             <a:pPr indent="0" marL="0">
               <a:buNone/>
             </a:pPr>
             <a:r>
-              <a:rPr lang="en-US" sz="1000" i="1" dirty="0">
-                <a:solidFill>
-                  <a:srgbClr val="5E6B75"/>
+              <a:rPr lang="en-US" sz="860" dirty="0">
+                <a:solidFill>
+                  <a:srgbClr val="F09A8C"/>
                 </a:solidFill>
                 <a:latin typeface="Calibri" pitchFamily="34" charset="0"/>
                 <a:ea typeface="Calibri" pitchFamily="34" charset="-122"/>
                 <a:cs typeface="Calibri" pitchFamily="34" charset="-120"/>
               </a:rPr>
-              <a:t>source: IMPRESS small-molecule performance report (impress-smallmol-performance/report.md), over impress_runs_export_nvme_2026-10-08.tar.gz  ·  source: performance_analysis report 2026-10-09 over impress_a_runs_2026-10-08.tar.gz (22702568, 22726105, 22728140 trust; 22684607, 22692304 smoke), code at d3c20ca</a:t>
-            </a:r>
-            <a:endParaRPr lang="en-US" sz="1000" dirty="0"/>
+              <a:t>And the lever this deck does NOT pull is now measured: one policy held fixed, k=1→8 per GPU, is worth ×5.52 on backbones per node-hour and ×5.11 on high-quality folds per GPU-hour; the best decision layer anybody has run is worth about ×3 at matched packing. Nobody has had both. We run one lineage on one of four GPUs.</a:t>
+            </a:r>
+            <a:endParaRPr lang="en-US" sz="860" dirty="0"/>
+          </a:p>
+        </p:txBody>
+      </p:sp>
+      <p:sp>
+        <p:nvSpPr>
+          <p:cNvPr id="47" name="Text 45"/>
+          <p:cNvSpPr txBox="1"/>
+          <p:nvPr/>
+        </p:nvSpPr>
+        <p:spPr>
+          <a:xfrm>
+            <a:off x="457200" y="6382512"/>
+            <a:ext cx="11277295" cy="384048"/>
+          </a:xfrm>
+          <a:prstGeom prst="rect">
+            <a:avLst/>
+          </a:prstGeom>
+          <a:noFill/>
+          <a:ln/>
+        </p:spPr>
+        <p:txBody>
+          <a:bodyPr wrap="square" lIns="0" tIns="0" rIns="0" bIns="0" rtlCol="0" anchor="t"/>
+          <a:lstStyle/>
+          <a:p>
+            <a:pPr indent="0" marL="0">
+              <a:buNone/>
+            </a:pPr>
+            <a:r>
+              <a:rPr lang="en-US" sz="850" i="1" dirty="0">
+                <a:solidFill>
+                  <a:srgbClr val="5E6B75"/>
+                </a:solidFill>
+                <a:latin typeface="Calibri" pitchFamily="34" charset="0"/>
+                <a:ea typeface="Calibri" pitchFamily="34" charset="-122"/>
+                <a:cs typeface="Calibri" pitchFamily="34" charset="-120"/>
+              </a:rPr>
+              <a:t>source: IMPRESS small-molecule performance report (impress-smallmol-performance/report.md), over impress_runs_export_nvme_2026-10-08.tar.gz  ·  source: performance_analysis report 2026-10-09 over impress_a_runs_2026-10-08.tar.gz (22702568, 22726105, 22728140 trust; 22684607, 22692304 smoke), code at d3c20ca  ·  packing ladder TRANSCRIBED, impress-agentic-performance report.md §12</a:t>
+            </a:r>
+            <a:endParaRPr lang="en-US" sz="850" dirty="0"/>
           </a:p>
         </p:txBody>
       </p:sp>
@@ -37419,7 +37438,7 @@
                 <a:ea typeface="Calibri" pitchFamily="34" charset="-122"/>
                 <a:cs typeface="Calibri" pitchFamily="34" charset="-120"/>
               </a:rPr>
-              <a:t>one use case is a 1,450-line pipeline class plus a 574-line runner; its non-adaptive variant is 102 lines.</a:t>
+              <a:t>one use case is a 1,362-line pipeline class plus a 575-line runner; its non-adaptive variant is 110 lines.</a:t>
             </a:r>
             <a:endParaRPr lang="en-US" sz="1200" dirty="0"/>
           </a:p>
@@ -37744,7 +37763,7 @@
                           <a:ea typeface="Calibri" pitchFamily="34" charset="-122"/>
                           <a:cs typeface="Calibri" pitchFamily="34" charset="-120"/>
                         </a:rPr>
-                        <a:t>19 next_step assignments in one 220-line decision function, over 7 STEP_ constants</a:t>
+                        <a:t>19 next_step assignments in one 236-line decision function, over 7 STEP_ constants</a:t>
                       </a:r>
                       <a:endParaRPr lang="en-US" sz="1000" dirty="0">
                         <a:latin typeface="Calibri" charset="0"/>
@@ -37812,7 +37831,7 @@
                           <a:ea typeface="Consolas" pitchFamily="34" charset="-122"/>
                           <a:cs typeface="Consolas" pitchFamily="34" charset="-120"/>
                         </a:rPr>
-                        <a:t>run_small_molecule_binding.py:210</a:t>
+                        <a:t>run_small_molecule_binding.py:191</a:t>
                       </a:r>
                       <a:endParaRPr lang="en-US" sz="750" dirty="0">
                         <a:latin typeface="Consolas" charset="0"/>
@@ -38224,7 +38243,7 @@
                           <a:ea typeface="Consolas" pitchFamily="34" charset="-122"/>
                           <a:cs typeface="Consolas" pitchFamily="34" charset="-120"/>
                         </a:rPr>
-                        <a:t>small_molecule_binding.py:1154</a:t>
+                        <a:t>small_molecule_binding.py:1074</a:t>
                       </a:r>
                       <a:endParaRPr lang="en-US" sz="750" dirty="0">
                         <a:latin typeface="Consolas" charset="0"/>
@@ -38708,8 +38727,8 @@
         </p:nvSpPr>
         <p:spPr>
           <a:xfrm>
-            <a:off x="457200" y="6053328"/>
-            <a:ext cx="11274552" cy="274320"/>
+            <a:off x="457200" y="5961888"/>
+            <a:ext cx="11274552" cy="365760"/>
           </a:xfrm>
           <a:prstGeom prst="rect">
             <a:avLst/>
@@ -38725,7 +38744,7 @@
               <a:buNone/>
             </a:pPr>
             <a:r>
-              <a:rPr lang="en-US" sz="1150" b="1" dirty="0">
+              <a:rPr lang="en-US" sz="1050" b="1" dirty="0">
                 <a:solidFill>
                   <a:srgbClr val="16222B"/>
                 </a:solidFill>
@@ -38739,7 +38758,7 @@
               <a:buNone/>
             </a:pPr>
             <a:r>
-              <a:rPr lang="en-US" sz="1150" dirty="0">
+              <a:rPr lang="en-US" sz="1050" dirty="0">
                 <a:solidFill>
                   <a:srgbClr val="22303C"/>
                 </a:solidFill>
@@ -38747,46 +38766,60 @@
                 <a:ea typeface="Calibri" pitchFamily="34" charset="-122"/>
                 <a:cs typeface="Calibri" pitchFamily="34" charset="-120"/>
               </a:rPr>
-              <a:t>it paid for lessons we inherited for free, including the NVMe fix this project ported out of its PR #67. Nothing here divides its numbers by ours.</a:t>
-            </a:r>
-            <a:endParaRPr lang="en-US" sz="1150" dirty="0"/>
-          </a:p>
-        </p:txBody>
-      </p:sp>
-      <p:sp>
-        <p:nvSpPr>
-          <p:cNvPr id="27" name="Text 24"/>
-          <p:cNvSpPr txBox="1"/>
-          <p:nvPr/>
-        </p:nvSpPr>
-        <p:spPr>
-          <a:xfrm>
-            <a:off x="457200" y="6492240"/>
-            <a:ext cx="11277295" cy="228600"/>
-          </a:xfrm>
-          <a:prstGeom prst="rect">
-            <a:avLst/>
-          </a:prstGeom>
-          <a:noFill/>
-          <a:ln/>
-        </p:spPr>
-        <p:txBody>
-          <a:bodyPr wrap="square" lIns="0" tIns="0" rIns="0" bIns="0" rtlCol="0" anchor="t"/>
-          <a:lstStyle/>
-          <a:p>
+              <a:t>it paid for lessons we inherited for free, including the NVMe fix this project ported out of its PR #67. Nothing here divides its numbers by ours. </a:t>
+            </a:r>
             <a:pPr indent="0" marL="0">
               <a:buNone/>
             </a:pPr>
             <a:r>
-              <a:rPr lang="en-US" sz="1000" i="1" dirty="0">
-                <a:solidFill>
-                  <a:srgbClr val="5E6B75"/>
+              <a:rPr lang="en-US" sz="1050" b="1" dirty="0">
+                <a:solidFill>
+                  <a:srgbClr val="8A6A3B"/>
                 </a:solidFill>
                 <a:latin typeface="Calibri" pitchFamily="34" charset="0"/>
                 <a:ea typeface="Calibri" pitchFamily="34" charset="-122"/>
                 <a:cs typeface="Calibri" pitchFamily="34" charset="-120"/>
               </a:rPr>
-              <a:t>source: IMPRESS small-molecule performance report (impress-smallmol-performance/report.md), over impress_runs_export_nvme_2026-10-08.tar.gz; structural counts mined from examples/small_molecule_binding in this repo at c163fe2.</a:t>
+              <a:t>And these are its BEST figures: same decision function, its own fastrelax rate fell 64%→49% by 2026-10-22, only 1.3 of 14.2 points from binder length. I credit the healthy period on purpose.</a:t>
+            </a:r>
+            <a:endParaRPr lang="en-US" sz="1050" dirty="0"/>
+          </a:p>
+        </p:txBody>
+      </p:sp>
+      <p:sp>
+        <p:nvSpPr>
+          <p:cNvPr id="27" name="Text 24"/>
+          <p:cNvSpPr txBox="1"/>
+          <p:nvPr/>
+        </p:nvSpPr>
+        <p:spPr>
+          <a:xfrm>
+            <a:off x="457200" y="6492240"/>
+            <a:ext cx="11277295" cy="228600"/>
+          </a:xfrm>
+          <a:prstGeom prst="rect">
+            <a:avLst/>
+          </a:prstGeom>
+          <a:noFill/>
+          <a:ln/>
+        </p:spPr>
+        <p:txBody>
+          <a:bodyPr wrap="square" lIns="0" tIns="0" rIns="0" bIns="0" rtlCol="0" anchor="t"/>
+          <a:lstStyle/>
+          <a:p>
+            <a:pPr indent="0" marL="0">
+              <a:buNone/>
+            </a:pPr>
+            <a:r>
+              <a:rPr lang="en-US" sz="1000" i="1" dirty="0">
+                <a:solidFill>
+                  <a:srgbClr val="5E6B75"/>
+                </a:solidFill>
+                <a:latin typeface="Calibri" pitchFamily="34" charset="0"/>
+                <a:ea typeface="Calibri" pitchFamily="34" charset="-122"/>
+                <a:cs typeface="Calibri" pitchFamily="34" charset="-120"/>
+              </a:rPr>
+              <a:t>source: IMPRESS small-molecule performance report (impress-smallmol-performance/report.md), over impress_runs_export_nvme_2026-10-08.tar.gz; fastrelax series TRANSCRIBED, impress-agentic-performance report.md §13; structural counts mined from examples/small_molecule_binding at bf32d1d.</a:t>
             </a:r>
             <a:endParaRPr lang="en-US" sz="1000" dirty="0"/>
           </a:p>
@@ -41977,7 +42010,7 @@
                 <a:ea typeface="Calibri" pitchFamily="34" charset="-122"/>
                 <a:cs typeface="Calibri" pitchFamily="34" charset="-120"/>
               </a:rPr>
-              <a:t>if a human reviewed every graph before it ran, you would not build most of this — you would write the DAG down once and schedule it. That is the right answer under review, and next door it is 1,450 lines of pipeline class per use case. Everything in act 1 is what you get for not writing it down; everything in act 2 is what that costs.</a:t>
+              <a:t>if a human reviewed every graph before it ran, you would not build most of this — you would write the DAG down once and schedule it. That is the right answer under review, and next door it is 1,362 lines of pipeline class per use case. Everything in act 1 is what you get for not writing it down; everything in act 2 is what that costs.</a:t>
             </a:r>
             <a:endParaRPr lang="en-US" sz="1300" dirty="0"/>
           </a:p>
